--- a/Mapped Curriculum Lessons/Grade 7/Lesson 19 - Random Steps and Choices/Random Steps and Choices - Slides.pptx
+++ b/Mapped Curriculum Lessons/Grade 7/Lesson 19 - Random Steps and Choices/Random Steps and Choices - Slides.pptx
@@ -2,28 +2,28 @@
 <file path=ppt/presentation.xml><?xml version="1.0" encoding="utf-8"?>
 <p:presentation xmlns:p="http://schemas.openxmlformats.org/presentationml/2006/main" embedTrueTypeFonts="1" saveSubsetFonts="0">
   <p:sldMasterIdLst>
-    <p:sldMasterId xmlns:r="http://schemas.openxmlformats.org/officeDocument/2006/relationships" id="2147483648" r:id="Rf11c695ac0f84954"/>
+    <p:sldMasterId xmlns:r="http://schemas.openxmlformats.org/officeDocument/2006/relationships" id="2147483648" r:id="R28f2cb8083204247"/>
   </p:sldMasterIdLst>
   <p:notesMasterIdLst>
-    <p:notesMasterId xmlns:r="http://schemas.openxmlformats.org/officeDocument/2006/relationships" r:id="R03b0799380504bc3"/>
+    <p:notesMasterId xmlns:r="http://schemas.openxmlformats.org/officeDocument/2006/relationships" r:id="R7d6ba12e49b64e31"/>
   </p:notesMasterIdLst>
   <p:sldIdLst>
-    <p:sldId xmlns:r="http://schemas.openxmlformats.org/officeDocument/2006/relationships" id="256" r:id="Re0a9f3c355db482a"/>
-    <p:sldId xmlns:r="http://schemas.openxmlformats.org/officeDocument/2006/relationships" id="257" r:id="R983084f0f6374779"/>
-    <p:sldId xmlns:r="http://schemas.openxmlformats.org/officeDocument/2006/relationships" id="258" r:id="Rf2d780607826471e"/>
-    <p:sldId xmlns:r="http://schemas.openxmlformats.org/officeDocument/2006/relationships" id="259" r:id="Ra1907fa048164bbe"/>
-    <p:sldId xmlns:r="http://schemas.openxmlformats.org/officeDocument/2006/relationships" id="260" r:id="Re5c8dbf5a9ca48b8"/>
-    <p:sldId xmlns:r="http://schemas.openxmlformats.org/officeDocument/2006/relationships" id="261" r:id="R5243a4e33e1c4ef1"/>
-    <p:sldId xmlns:r="http://schemas.openxmlformats.org/officeDocument/2006/relationships" id="262" r:id="R258b73442aab49b2"/>
-    <p:sldId xmlns:r="http://schemas.openxmlformats.org/officeDocument/2006/relationships" id="263" r:id="R2ae768920616473f"/>
-    <p:sldId xmlns:r="http://schemas.openxmlformats.org/officeDocument/2006/relationships" id="264" r:id="R95f832a2dabb437f"/>
+    <p:sldId xmlns:r="http://schemas.openxmlformats.org/officeDocument/2006/relationships" id="256" r:id="R90dc954437be4219"/>
+    <p:sldId xmlns:r="http://schemas.openxmlformats.org/officeDocument/2006/relationships" id="257" r:id="Rf4cddc366c0544fe"/>
+    <p:sldId xmlns:r="http://schemas.openxmlformats.org/officeDocument/2006/relationships" id="258" r:id="R2b5656c2e16a43ef"/>
+    <p:sldId xmlns:r="http://schemas.openxmlformats.org/officeDocument/2006/relationships" id="259" r:id="Rb622d03830074b6b"/>
+    <p:sldId xmlns:r="http://schemas.openxmlformats.org/officeDocument/2006/relationships" id="260" r:id="R9b2a44e679ec4b97"/>
+    <p:sldId xmlns:r="http://schemas.openxmlformats.org/officeDocument/2006/relationships" id="261" r:id="Rfd59d7a765bf4c30"/>
+    <p:sldId xmlns:r="http://schemas.openxmlformats.org/officeDocument/2006/relationships" id="262" r:id="Rc0c38b25d363466c"/>
+    <p:sldId xmlns:r="http://schemas.openxmlformats.org/officeDocument/2006/relationships" id="263" r:id="Rc18f41eef63b4ae4"/>
+    <p:sldId xmlns:r="http://schemas.openxmlformats.org/officeDocument/2006/relationships" id="264" r:id="Re1ad16922f114e7c"/>
   </p:sldIdLst>
   <p:sldSz cx="12192000" cy="6858000"/>
   <p:notesSz cx="6858000" cy="9144000"/>
   <p:embeddedFontLst>
     <p:embeddedFont>
       <p:font typeface="JetBrains Mono"/>
-      <p:regular xmlns:r="http://schemas.openxmlformats.org/officeDocument/2006/relationships" r:id="R0ab42ebaa6e34c48"/>
+      <p:regular xmlns:r="http://schemas.openxmlformats.org/officeDocument/2006/relationships" r:id="Red309c78d5b84694"/>
     </p:embeddedFont>
   </p:embeddedFontLst>
 </p:presentation>
@@ -1071,7 +1071,7 @@
           <p:nvPr/>
         </p:nvPicPr>
         <p:blipFill rotWithShape="1">
-          <a:blip xmlns:r="http://schemas.openxmlformats.org/officeDocument/2006/relationships" xmlns:a="http://schemas.openxmlformats.org/drawingml/2006/main" r:embed="Rfe3f74fe22224aae"/>
+          <a:blip xmlns:r="http://schemas.openxmlformats.org/officeDocument/2006/relationships" xmlns:a="http://schemas.openxmlformats.org/drawingml/2006/main" r:embed="Rd7a6cf7c463f4bbc"/>
           <a:stretch xmlns:a="http://schemas.openxmlformats.org/drawingml/2006/main"/>
         </p:blipFill>
         <p:spPr>
@@ -1451,7 +1451,7 @@
           <p:nvPr/>
         </p:nvPicPr>
         <p:blipFill rotWithShape="1">
-          <a:blip xmlns:r="http://schemas.openxmlformats.org/officeDocument/2006/relationships" xmlns:a="http://schemas.openxmlformats.org/drawingml/2006/main" r:embed="Ra90c65bb338948bd">
+          <a:blip xmlns:r="http://schemas.openxmlformats.org/officeDocument/2006/relationships" xmlns:a="http://schemas.openxmlformats.org/drawingml/2006/main" r:embed="Red3eea30176e4538">
             <a:alphaModFix amt="28000"/>
           </a:blip>
           <a:stretch xmlns:a="http://schemas.openxmlformats.org/drawingml/2006/main"/>
@@ -1664,7 +1664,7 @@
           <p:nvPr/>
         </p:nvPicPr>
         <p:blipFill rotWithShape="1">
-          <a:blip xmlns:r="http://schemas.openxmlformats.org/officeDocument/2006/relationships" xmlns:a="http://schemas.openxmlformats.org/drawingml/2006/main" r:embed="R7aa0666841ee4d7e">
+          <a:blip xmlns:r="http://schemas.openxmlformats.org/officeDocument/2006/relationships" xmlns:a="http://schemas.openxmlformats.org/drawingml/2006/main" r:embed="R1fa4c3989533480c">
             <a:alphaModFix amt="28000"/>
           </a:blip>
           <a:stretch xmlns:a="http://schemas.openxmlformats.org/drawingml/2006/main"/>
@@ -1899,7 +1899,7 @@
           <p:nvPr/>
         </p:nvPicPr>
         <p:blipFill rotWithShape="1">
-          <a:blip xmlns:r="http://schemas.openxmlformats.org/officeDocument/2006/relationships" xmlns:a="http://schemas.openxmlformats.org/drawingml/2006/main" r:embed="Rc7b1c41e52cb4264">
+          <a:blip xmlns:r="http://schemas.openxmlformats.org/officeDocument/2006/relationships" xmlns:a="http://schemas.openxmlformats.org/drawingml/2006/main" r:embed="Re22ff8444fd24de4">
             <a:alphaModFix amt="28000"/>
           </a:blip>
           <a:stretch xmlns:a="http://schemas.openxmlformats.org/drawingml/2006/main"/>
@@ -2176,7 +2176,7 @@
           <p:nvPr/>
         </p:nvPicPr>
         <p:blipFill rotWithShape="1">
-          <a:blip xmlns:r="http://schemas.openxmlformats.org/officeDocument/2006/relationships" xmlns:a="http://schemas.openxmlformats.org/drawingml/2006/main" r:embed="R62bed17b3ba0426a">
+          <a:blip xmlns:r="http://schemas.openxmlformats.org/officeDocument/2006/relationships" xmlns:a="http://schemas.openxmlformats.org/drawingml/2006/main" r:embed="R584a51be7e734a89">
             <a:alphaModFix amt="28000"/>
           </a:blip>
           <a:stretch xmlns:a="http://schemas.openxmlformats.org/drawingml/2006/main"/>
@@ -2451,7 +2451,7 @@
           <p:nvPr/>
         </p:nvPicPr>
         <p:blipFill rotWithShape="1">
-          <a:blip xmlns:r="http://schemas.openxmlformats.org/officeDocument/2006/relationships" xmlns:a="http://schemas.openxmlformats.org/drawingml/2006/main" r:embed="R460352ab1963498f">
+          <a:blip xmlns:r="http://schemas.openxmlformats.org/officeDocument/2006/relationships" xmlns:a="http://schemas.openxmlformats.org/drawingml/2006/main" r:embed="R3353820965a04667">
             <a:alphaModFix amt="28000"/>
           </a:blip>
           <a:stretch xmlns:a="http://schemas.openxmlformats.org/drawingml/2006/main"/>
@@ -2875,7 +2875,7 @@
           <p:nvPr/>
         </p:nvPicPr>
         <p:blipFill rotWithShape="1">
-          <a:blip xmlns:r="http://schemas.openxmlformats.org/officeDocument/2006/relationships" xmlns:a="http://schemas.openxmlformats.org/drawingml/2006/main" r:embed="Ra36c38eed6954978">
+          <a:blip xmlns:r="http://schemas.openxmlformats.org/officeDocument/2006/relationships" xmlns:a="http://schemas.openxmlformats.org/drawingml/2006/main" r:embed="Rd1277d3a6f6b400c">
             <a:alphaModFix amt="28000"/>
           </a:blip>
           <a:stretch xmlns:a="http://schemas.openxmlformats.org/drawingml/2006/main"/>
@@ -3016,7 +3016,7 @@
           <p:nvPr/>
         </p:nvPicPr>
         <p:blipFill rotWithShape="1">
-          <a:blip xmlns:r="http://schemas.openxmlformats.org/officeDocument/2006/relationships" xmlns:a="http://schemas.openxmlformats.org/drawingml/2006/main" r:embed="R5c16888bcc024d1c">
+          <a:blip xmlns:r="http://schemas.openxmlformats.org/officeDocument/2006/relationships" xmlns:a="http://schemas.openxmlformats.org/drawingml/2006/main" r:embed="Re58272648c634bde">
             <a:alphaModFix amt="28000"/>
           </a:blip>
           <a:stretch xmlns:a="http://schemas.openxmlformats.org/drawingml/2006/main"/>
@@ -3130,7 +3130,7 @@
           <p:nvPr/>
         </p:nvPicPr>
         <p:blipFill rotWithShape="1">
-          <a:blip xmlns:r="http://schemas.openxmlformats.org/officeDocument/2006/relationships" xmlns:a="http://schemas.openxmlformats.org/drawingml/2006/main" r:embed="R77cb827dba96402f">
+          <a:blip xmlns:r="http://schemas.openxmlformats.org/officeDocument/2006/relationships" xmlns:a="http://schemas.openxmlformats.org/drawingml/2006/main" r:embed="Rc5ad3709c1f04a24">
             <a:alphaModFix amt="28000"/>
           </a:blip>
           <a:stretch xmlns:a="http://schemas.openxmlformats.org/drawingml/2006/main"/>
@@ -3457,7 +3457,7 @@
           <p:nvPr/>
         </p:nvPicPr>
         <p:blipFill rotWithShape="1">
-          <a:blip xmlns:r="http://schemas.openxmlformats.org/officeDocument/2006/relationships" xmlns:a="http://schemas.openxmlformats.org/drawingml/2006/main" r:embed="Re142c02134004c56">
+          <a:blip xmlns:r="http://schemas.openxmlformats.org/officeDocument/2006/relationships" xmlns:a="http://schemas.openxmlformats.org/drawingml/2006/main" r:embed="Rb6ab116f7d66440b">
             <a:alphaModFix amt="28000"/>
           </a:blip>
           <a:stretch xmlns:a="http://schemas.openxmlformats.org/drawingml/2006/main"/>
@@ -3745,7 +3745,7 @@
           <p:nvPr/>
         </p:nvPicPr>
         <p:blipFill rotWithShape="1">
-          <a:blip xmlns:r="http://schemas.openxmlformats.org/officeDocument/2006/relationships" xmlns:a="http://schemas.openxmlformats.org/drawingml/2006/main" r:embed="Rd9ba79d7d1044fbc">
+          <a:blip xmlns:r="http://schemas.openxmlformats.org/officeDocument/2006/relationships" xmlns:a="http://schemas.openxmlformats.org/drawingml/2006/main" r:embed="R22cb733af26244a9">
             <a:alphaModFix amt="28000"/>
           </a:blip>
           <a:stretch xmlns:a="http://schemas.openxmlformats.org/drawingml/2006/main"/>
@@ -3982,17 +3982,17 @@
   </p:cSld>
   <p:clrMap bg1="lt1" tx1="dk1" bg2="lt2" tx2="dk2" accent1="accent1" accent2="accent2" accent3="accent3" accent4="accent4" accent5="accent5" accent6="accent6" hlink="hlink" folHlink="folHlink"/>
   <p:sldLayoutIdLst>
-    <p:sldLayoutId xmlns:r="http://schemas.openxmlformats.org/officeDocument/2006/relationships" id="2147483649" r:id="Rf6aca546c4f84c88"/>
-    <p:sldLayoutId xmlns:r="http://schemas.openxmlformats.org/officeDocument/2006/relationships" id="2147483650" r:id="R5aa8e143ecbf4aa1"/>
-    <p:sldLayoutId xmlns:r="http://schemas.openxmlformats.org/officeDocument/2006/relationships" id="2147483651" r:id="Ra48a0feacc9d4091"/>
-    <p:sldLayoutId xmlns:r="http://schemas.openxmlformats.org/officeDocument/2006/relationships" id="2147483652" r:id="R4a0c59b597674e66"/>
-    <p:sldLayoutId xmlns:r="http://schemas.openxmlformats.org/officeDocument/2006/relationships" id="2147483653" r:id="Rb9599ab384e14638"/>
-    <p:sldLayoutId xmlns:r="http://schemas.openxmlformats.org/officeDocument/2006/relationships" id="2147483654" r:id="R1328caeccc0b4acb"/>
-    <p:sldLayoutId xmlns:r="http://schemas.openxmlformats.org/officeDocument/2006/relationships" id="2147483655" r:id="R9009060b72024c2d"/>
-    <p:sldLayoutId xmlns:r="http://schemas.openxmlformats.org/officeDocument/2006/relationships" id="2147483656" r:id="R730ae12c9b614a24"/>
-    <p:sldLayoutId xmlns:r="http://schemas.openxmlformats.org/officeDocument/2006/relationships" id="2147483657" r:id="R93bd73632c114bf9"/>
-    <p:sldLayoutId xmlns:r="http://schemas.openxmlformats.org/officeDocument/2006/relationships" id="2147483658" r:id="Rc5a74357fbc947e4"/>
-    <p:sldLayoutId xmlns:r="http://schemas.openxmlformats.org/officeDocument/2006/relationships" id="2147483659" r:id="R2f0a0be2b0344ca1"/>
+    <p:sldLayoutId xmlns:r="http://schemas.openxmlformats.org/officeDocument/2006/relationships" id="2147483649" r:id="Ra36162b2ca1f4701"/>
+    <p:sldLayoutId xmlns:r="http://schemas.openxmlformats.org/officeDocument/2006/relationships" id="2147483650" r:id="R91c925fdff9e4592"/>
+    <p:sldLayoutId xmlns:r="http://schemas.openxmlformats.org/officeDocument/2006/relationships" id="2147483651" r:id="Ra01855a045dc45c6"/>
+    <p:sldLayoutId xmlns:r="http://schemas.openxmlformats.org/officeDocument/2006/relationships" id="2147483652" r:id="R0e483c27f6974fee"/>
+    <p:sldLayoutId xmlns:r="http://schemas.openxmlformats.org/officeDocument/2006/relationships" id="2147483653" r:id="Rfd53673be87d47f4"/>
+    <p:sldLayoutId xmlns:r="http://schemas.openxmlformats.org/officeDocument/2006/relationships" id="2147483654" r:id="R44152a2d0e7c4e69"/>
+    <p:sldLayoutId xmlns:r="http://schemas.openxmlformats.org/officeDocument/2006/relationships" id="2147483655" r:id="Ra5d0c680685c487f"/>
+    <p:sldLayoutId xmlns:r="http://schemas.openxmlformats.org/officeDocument/2006/relationships" id="2147483656" r:id="Rc15a6f2458a0413a"/>
+    <p:sldLayoutId xmlns:r="http://schemas.openxmlformats.org/officeDocument/2006/relationships" id="2147483657" r:id="R85bdfe5533bf4f75"/>
+    <p:sldLayoutId xmlns:r="http://schemas.openxmlformats.org/officeDocument/2006/relationships" id="2147483658" r:id="Rd421c1d209984a40"/>
+    <p:sldLayoutId xmlns:r="http://schemas.openxmlformats.org/officeDocument/2006/relationships" id="2147483659" r:id="Rc6be2b81c1274046"/>
   </p:sldLayoutIdLst>
   <p:hf hdr="0" ftr="0" dt="0"/>
   <p:txStyles>
@@ -7424,29 +7424,7 @@
                 <a:ea typeface="Calibri"/>
                 <a:cs typeface="Calibri"/>
               </a:rPr>
-              <a:t> to the colour choices and generate two independently sto</a:t>
-            </a:r>
-            <a:r>
-              <a:rPr sz="2400" b="0">
-                <a:solidFill>
-                  <a:srgbClr val="067D17"/>
-                </a:solidFill>
-                <a:latin typeface="JetBrains Mono"/>
-                <a:ea typeface="JetBrains Mono"/>
-                <a:cs typeface="JetBrains Mono"/>
-              </a:rPr>
-              <a:t>"red"</a:t>
-            </a:r>
-            <a:r>
-              <a:rPr sz="2400" b="0">
-                <a:solidFill>
-                  <a:srgbClr val="080808"/>
-                </a:solidFill>
-                <a:latin typeface="Calibri"/>
-                <a:ea typeface="Calibri"/>
-                <a:cs typeface="Calibri"/>
-              </a:rPr>
-              <a:t> colour selections. Display both selections on labelled lines.</a:t>
+              <a:t> to the colour choices and generate two independently stored colour selections. Display both selections on labelled lines.</a:t>
             </a:r>
           </a:p>
         </p:txBody>
@@ -8026,29 +8004,7 @@
                 <a:ea typeface="Calibri"/>
                 <a:cs typeface="Calibri"/>
               </a:rPr>
-              <a:t> you design. Display one instruction such as 8 </a:t>
-            </a:r>
-            <a:r>
-              <a:rPr sz="2400" b="0">
-                <a:solidFill>
-                  <a:srgbClr val="067D17"/>
-                </a:solidFill>
-                <a:latin typeface="JetBrains Mono"/>
-                <a:ea typeface="JetBrains Mono"/>
-                <a:cs typeface="JetBrains Mono"/>
-              </a:rPr>
-              <a:t>"jumps"</a:t>
-            </a:r>
-            <a:r>
-              <a:rPr sz="2400" b="0">
-                <a:solidFill>
-                  <a:srgbClr val="080808"/>
-                </a:solidFill>
-                <a:latin typeface="Calibri"/>
-                <a:ea typeface="Calibri"/>
-                <a:cs typeface="Calibri"/>
-              </a:rPr>
-              <a:t>.</a:t>
+              <a:t> you design. Display one instruction such as 8 jumps.</a:t>
             </a:r>
           </a:p>
         </p:txBody>

--- a/Mapped Curriculum Lessons/Grade 7/Lesson 19 - Random Steps and Choices/Random Steps and Choices - Slides.pptx
+++ b/Mapped Curriculum Lessons/Grade 7/Lesson 19 - Random Steps and Choices/Random Steps and Choices - Slides.pptx
@@ -2,28 +2,28 @@
 <file path=ppt/presentation.xml><?xml version="1.0" encoding="utf-8"?>
 <p:presentation xmlns:p="http://schemas.openxmlformats.org/presentationml/2006/main" embedTrueTypeFonts="1" saveSubsetFonts="0">
   <p:sldMasterIdLst>
-    <p:sldMasterId xmlns:r="http://schemas.openxmlformats.org/officeDocument/2006/relationships" id="2147483648" r:id="R28f2cb8083204247"/>
+    <p:sldMasterId xmlns:r="http://schemas.openxmlformats.org/officeDocument/2006/relationships" id="2147483648" r:id="R970296e8e35d4c29"/>
   </p:sldMasterIdLst>
   <p:notesMasterIdLst>
-    <p:notesMasterId xmlns:r="http://schemas.openxmlformats.org/officeDocument/2006/relationships" r:id="R7d6ba12e49b64e31"/>
+    <p:notesMasterId xmlns:r="http://schemas.openxmlformats.org/officeDocument/2006/relationships" r:id="R961912db1bd14942"/>
   </p:notesMasterIdLst>
   <p:sldIdLst>
-    <p:sldId xmlns:r="http://schemas.openxmlformats.org/officeDocument/2006/relationships" id="256" r:id="R90dc954437be4219"/>
-    <p:sldId xmlns:r="http://schemas.openxmlformats.org/officeDocument/2006/relationships" id="257" r:id="Rf4cddc366c0544fe"/>
-    <p:sldId xmlns:r="http://schemas.openxmlformats.org/officeDocument/2006/relationships" id="258" r:id="R2b5656c2e16a43ef"/>
-    <p:sldId xmlns:r="http://schemas.openxmlformats.org/officeDocument/2006/relationships" id="259" r:id="Rb622d03830074b6b"/>
-    <p:sldId xmlns:r="http://schemas.openxmlformats.org/officeDocument/2006/relationships" id="260" r:id="R9b2a44e679ec4b97"/>
-    <p:sldId xmlns:r="http://schemas.openxmlformats.org/officeDocument/2006/relationships" id="261" r:id="Rfd59d7a765bf4c30"/>
-    <p:sldId xmlns:r="http://schemas.openxmlformats.org/officeDocument/2006/relationships" id="262" r:id="Rc0c38b25d363466c"/>
-    <p:sldId xmlns:r="http://schemas.openxmlformats.org/officeDocument/2006/relationships" id="263" r:id="Rc18f41eef63b4ae4"/>
-    <p:sldId xmlns:r="http://schemas.openxmlformats.org/officeDocument/2006/relationships" id="264" r:id="Re1ad16922f114e7c"/>
+    <p:sldId xmlns:r="http://schemas.openxmlformats.org/officeDocument/2006/relationships" id="256" r:id="Rb49ff554c0024b40"/>
+    <p:sldId xmlns:r="http://schemas.openxmlformats.org/officeDocument/2006/relationships" id="257" r:id="R6da791c9cb674da2"/>
+    <p:sldId xmlns:r="http://schemas.openxmlformats.org/officeDocument/2006/relationships" id="258" r:id="R80caaee266194d9c"/>
+    <p:sldId xmlns:r="http://schemas.openxmlformats.org/officeDocument/2006/relationships" id="259" r:id="Rbbb806dbc81b467a"/>
+    <p:sldId xmlns:r="http://schemas.openxmlformats.org/officeDocument/2006/relationships" id="260" r:id="R52533a870cef4f24"/>
+    <p:sldId xmlns:r="http://schemas.openxmlformats.org/officeDocument/2006/relationships" id="261" r:id="Rc8cdbcce8d694435"/>
+    <p:sldId xmlns:r="http://schemas.openxmlformats.org/officeDocument/2006/relationships" id="262" r:id="Ra6c0fe9eabc94fb5"/>
+    <p:sldId xmlns:r="http://schemas.openxmlformats.org/officeDocument/2006/relationships" id="263" r:id="R9355b88a2ee24b6e"/>
+    <p:sldId xmlns:r="http://schemas.openxmlformats.org/officeDocument/2006/relationships" id="264" r:id="R7beeb3a0aa534d89"/>
   </p:sldIdLst>
   <p:sldSz cx="12192000" cy="6858000"/>
   <p:notesSz cx="6858000" cy="9144000"/>
   <p:embeddedFontLst>
     <p:embeddedFont>
       <p:font typeface="JetBrains Mono"/>
-      <p:regular xmlns:r="http://schemas.openxmlformats.org/officeDocument/2006/relationships" r:id="Red309c78d5b84694"/>
+      <p:regular xmlns:r="http://schemas.openxmlformats.org/officeDocument/2006/relationships" r:id="R9bf9910fa51a43f4"/>
     </p:embeddedFont>
   </p:embeddedFontLst>
 </p:presentation>
@@ -1071,7 +1071,7 @@
           <p:nvPr/>
         </p:nvPicPr>
         <p:blipFill rotWithShape="1">
-          <a:blip xmlns:r="http://schemas.openxmlformats.org/officeDocument/2006/relationships" xmlns:a="http://schemas.openxmlformats.org/drawingml/2006/main" r:embed="Rd7a6cf7c463f4bbc"/>
+          <a:blip xmlns:r="http://schemas.openxmlformats.org/officeDocument/2006/relationships" xmlns:a="http://schemas.openxmlformats.org/drawingml/2006/main" r:embed="R28fabfdb5fee4803"/>
           <a:stretch xmlns:a="http://schemas.openxmlformats.org/drawingml/2006/main"/>
         </p:blipFill>
         <p:spPr>
@@ -1451,7 +1451,7 @@
           <p:nvPr/>
         </p:nvPicPr>
         <p:blipFill rotWithShape="1">
-          <a:blip xmlns:r="http://schemas.openxmlformats.org/officeDocument/2006/relationships" xmlns:a="http://schemas.openxmlformats.org/drawingml/2006/main" r:embed="Red3eea30176e4538">
+          <a:blip xmlns:r="http://schemas.openxmlformats.org/officeDocument/2006/relationships" xmlns:a="http://schemas.openxmlformats.org/drawingml/2006/main" r:embed="R75c37c347a724b1a">
             <a:alphaModFix amt="28000"/>
           </a:blip>
           <a:stretch xmlns:a="http://schemas.openxmlformats.org/drawingml/2006/main"/>
@@ -1664,7 +1664,7 @@
           <p:nvPr/>
         </p:nvPicPr>
         <p:blipFill rotWithShape="1">
-          <a:blip xmlns:r="http://schemas.openxmlformats.org/officeDocument/2006/relationships" xmlns:a="http://schemas.openxmlformats.org/drawingml/2006/main" r:embed="R1fa4c3989533480c">
+          <a:blip xmlns:r="http://schemas.openxmlformats.org/officeDocument/2006/relationships" xmlns:a="http://schemas.openxmlformats.org/drawingml/2006/main" r:embed="Rbfd18dd58eb2486f">
             <a:alphaModFix amt="28000"/>
           </a:blip>
           <a:stretch xmlns:a="http://schemas.openxmlformats.org/drawingml/2006/main"/>
@@ -1899,7 +1899,7 @@
           <p:nvPr/>
         </p:nvPicPr>
         <p:blipFill rotWithShape="1">
-          <a:blip xmlns:r="http://schemas.openxmlformats.org/officeDocument/2006/relationships" xmlns:a="http://schemas.openxmlformats.org/drawingml/2006/main" r:embed="Re22ff8444fd24de4">
+          <a:blip xmlns:r="http://schemas.openxmlformats.org/officeDocument/2006/relationships" xmlns:a="http://schemas.openxmlformats.org/drawingml/2006/main" r:embed="Rb1f362e2d2a447bb">
             <a:alphaModFix amt="28000"/>
           </a:blip>
           <a:stretch xmlns:a="http://schemas.openxmlformats.org/drawingml/2006/main"/>
@@ -2176,7 +2176,7 @@
           <p:nvPr/>
         </p:nvPicPr>
         <p:blipFill rotWithShape="1">
-          <a:blip xmlns:r="http://schemas.openxmlformats.org/officeDocument/2006/relationships" xmlns:a="http://schemas.openxmlformats.org/drawingml/2006/main" r:embed="R584a51be7e734a89">
+          <a:blip xmlns:r="http://schemas.openxmlformats.org/officeDocument/2006/relationships" xmlns:a="http://schemas.openxmlformats.org/drawingml/2006/main" r:embed="Rdd334c1c094c413c">
             <a:alphaModFix amt="28000"/>
           </a:blip>
           <a:stretch xmlns:a="http://schemas.openxmlformats.org/drawingml/2006/main"/>
@@ -2451,7 +2451,7 @@
           <p:nvPr/>
         </p:nvPicPr>
         <p:blipFill rotWithShape="1">
-          <a:blip xmlns:r="http://schemas.openxmlformats.org/officeDocument/2006/relationships" xmlns:a="http://schemas.openxmlformats.org/drawingml/2006/main" r:embed="R3353820965a04667">
+          <a:blip xmlns:r="http://schemas.openxmlformats.org/officeDocument/2006/relationships" xmlns:a="http://schemas.openxmlformats.org/drawingml/2006/main" r:embed="Rf831aee9ded04681">
             <a:alphaModFix amt="28000"/>
           </a:blip>
           <a:stretch xmlns:a="http://schemas.openxmlformats.org/drawingml/2006/main"/>
@@ -2875,7 +2875,7 @@
           <p:nvPr/>
         </p:nvPicPr>
         <p:blipFill rotWithShape="1">
-          <a:blip xmlns:r="http://schemas.openxmlformats.org/officeDocument/2006/relationships" xmlns:a="http://schemas.openxmlformats.org/drawingml/2006/main" r:embed="Rd1277d3a6f6b400c">
+          <a:blip xmlns:r="http://schemas.openxmlformats.org/officeDocument/2006/relationships" xmlns:a="http://schemas.openxmlformats.org/drawingml/2006/main" r:embed="R6a9d03e3c0be4b40">
             <a:alphaModFix amt="28000"/>
           </a:blip>
           <a:stretch xmlns:a="http://schemas.openxmlformats.org/drawingml/2006/main"/>
@@ -3016,7 +3016,7 @@
           <p:nvPr/>
         </p:nvPicPr>
         <p:blipFill rotWithShape="1">
-          <a:blip xmlns:r="http://schemas.openxmlformats.org/officeDocument/2006/relationships" xmlns:a="http://schemas.openxmlformats.org/drawingml/2006/main" r:embed="Re58272648c634bde">
+          <a:blip xmlns:r="http://schemas.openxmlformats.org/officeDocument/2006/relationships" xmlns:a="http://schemas.openxmlformats.org/drawingml/2006/main" r:embed="R41d22a01c72b40c1">
             <a:alphaModFix amt="28000"/>
           </a:blip>
           <a:stretch xmlns:a="http://schemas.openxmlformats.org/drawingml/2006/main"/>
@@ -3130,7 +3130,7 @@
           <p:nvPr/>
         </p:nvPicPr>
         <p:blipFill rotWithShape="1">
-          <a:blip xmlns:r="http://schemas.openxmlformats.org/officeDocument/2006/relationships" xmlns:a="http://schemas.openxmlformats.org/drawingml/2006/main" r:embed="Rc5ad3709c1f04a24">
+          <a:blip xmlns:r="http://schemas.openxmlformats.org/officeDocument/2006/relationships" xmlns:a="http://schemas.openxmlformats.org/drawingml/2006/main" r:embed="R7a112827065c4188">
             <a:alphaModFix amt="28000"/>
           </a:blip>
           <a:stretch xmlns:a="http://schemas.openxmlformats.org/drawingml/2006/main"/>
@@ -3457,7 +3457,7 @@
           <p:nvPr/>
         </p:nvPicPr>
         <p:blipFill rotWithShape="1">
-          <a:blip xmlns:r="http://schemas.openxmlformats.org/officeDocument/2006/relationships" xmlns:a="http://schemas.openxmlformats.org/drawingml/2006/main" r:embed="Rb6ab116f7d66440b">
+          <a:blip xmlns:r="http://schemas.openxmlformats.org/officeDocument/2006/relationships" xmlns:a="http://schemas.openxmlformats.org/drawingml/2006/main" r:embed="R57f88b818d7e4b28">
             <a:alphaModFix amt="28000"/>
           </a:blip>
           <a:stretch xmlns:a="http://schemas.openxmlformats.org/drawingml/2006/main"/>
@@ -3745,7 +3745,7 @@
           <p:nvPr/>
         </p:nvPicPr>
         <p:blipFill rotWithShape="1">
-          <a:blip xmlns:r="http://schemas.openxmlformats.org/officeDocument/2006/relationships" xmlns:a="http://schemas.openxmlformats.org/drawingml/2006/main" r:embed="R22cb733af26244a9">
+          <a:blip xmlns:r="http://schemas.openxmlformats.org/officeDocument/2006/relationships" xmlns:a="http://schemas.openxmlformats.org/drawingml/2006/main" r:embed="Rb38373d7f7b343ae">
             <a:alphaModFix amt="28000"/>
           </a:blip>
           <a:stretch xmlns:a="http://schemas.openxmlformats.org/drawingml/2006/main"/>
@@ -3982,17 +3982,17 @@
   </p:cSld>
   <p:clrMap bg1="lt1" tx1="dk1" bg2="lt2" tx2="dk2" accent1="accent1" accent2="accent2" accent3="accent3" accent4="accent4" accent5="accent5" accent6="accent6" hlink="hlink" folHlink="folHlink"/>
   <p:sldLayoutIdLst>
-    <p:sldLayoutId xmlns:r="http://schemas.openxmlformats.org/officeDocument/2006/relationships" id="2147483649" r:id="Ra36162b2ca1f4701"/>
-    <p:sldLayoutId xmlns:r="http://schemas.openxmlformats.org/officeDocument/2006/relationships" id="2147483650" r:id="R91c925fdff9e4592"/>
-    <p:sldLayoutId xmlns:r="http://schemas.openxmlformats.org/officeDocument/2006/relationships" id="2147483651" r:id="Ra01855a045dc45c6"/>
-    <p:sldLayoutId xmlns:r="http://schemas.openxmlformats.org/officeDocument/2006/relationships" id="2147483652" r:id="R0e483c27f6974fee"/>
-    <p:sldLayoutId xmlns:r="http://schemas.openxmlformats.org/officeDocument/2006/relationships" id="2147483653" r:id="Rfd53673be87d47f4"/>
-    <p:sldLayoutId xmlns:r="http://schemas.openxmlformats.org/officeDocument/2006/relationships" id="2147483654" r:id="R44152a2d0e7c4e69"/>
-    <p:sldLayoutId xmlns:r="http://schemas.openxmlformats.org/officeDocument/2006/relationships" id="2147483655" r:id="Ra5d0c680685c487f"/>
-    <p:sldLayoutId xmlns:r="http://schemas.openxmlformats.org/officeDocument/2006/relationships" id="2147483656" r:id="Rc15a6f2458a0413a"/>
-    <p:sldLayoutId xmlns:r="http://schemas.openxmlformats.org/officeDocument/2006/relationships" id="2147483657" r:id="R85bdfe5533bf4f75"/>
-    <p:sldLayoutId xmlns:r="http://schemas.openxmlformats.org/officeDocument/2006/relationships" id="2147483658" r:id="Rd421c1d209984a40"/>
-    <p:sldLayoutId xmlns:r="http://schemas.openxmlformats.org/officeDocument/2006/relationships" id="2147483659" r:id="Rc6be2b81c1274046"/>
+    <p:sldLayoutId xmlns:r="http://schemas.openxmlformats.org/officeDocument/2006/relationships" id="2147483649" r:id="R71861728d68a46b9"/>
+    <p:sldLayoutId xmlns:r="http://schemas.openxmlformats.org/officeDocument/2006/relationships" id="2147483650" r:id="Rb1879614b10f4423"/>
+    <p:sldLayoutId xmlns:r="http://schemas.openxmlformats.org/officeDocument/2006/relationships" id="2147483651" r:id="R94791b3bdf294a2b"/>
+    <p:sldLayoutId xmlns:r="http://schemas.openxmlformats.org/officeDocument/2006/relationships" id="2147483652" r:id="R3f0ec24086054ab5"/>
+    <p:sldLayoutId xmlns:r="http://schemas.openxmlformats.org/officeDocument/2006/relationships" id="2147483653" r:id="R8679542a9b884a15"/>
+    <p:sldLayoutId xmlns:r="http://schemas.openxmlformats.org/officeDocument/2006/relationships" id="2147483654" r:id="Rc2b853fa248e4904"/>
+    <p:sldLayoutId xmlns:r="http://schemas.openxmlformats.org/officeDocument/2006/relationships" id="2147483655" r:id="Rc1baa2ef35f8418f"/>
+    <p:sldLayoutId xmlns:r="http://schemas.openxmlformats.org/officeDocument/2006/relationships" id="2147483656" r:id="R72b5d8d288af40be"/>
+    <p:sldLayoutId xmlns:r="http://schemas.openxmlformats.org/officeDocument/2006/relationships" id="2147483657" r:id="R968e81c1658d4d6e"/>
+    <p:sldLayoutId xmlns:r="http://schemas.openxmlformats.org/officeDocument/2006/relationships" id="2147483658" r:id="R351a56b2a9a74763"/>
+    <p:sldLayoutId xmlns:r="http://schemas.openxmlformats.org/officeDocument/2006/relationships" id="2147483659" r:id="R7a80e5418d564e57"/>
   </p:sldLayoutIdLst>
   <p:hf hdr="0" ftr="0" dt="0"/>
   <p:txStyles>
@@ -6844,7 +6844,51 @@
                 <a:ea typeface="Calibri"/>
                 <a:cs typeface="Calibri"/>
               </a:rPr>
-              <a:t>Generate and display a random multiple of 5 from 5 to 30. Run the program several times; every result should be a multiple of 5 in this range.</a:t>
+              <a:t>Use </a:t>
+            </a:r>
+            <a:r>
+              <a:rPr sz="2400" b="0">
+                <a:solidFill>
+                  <a:srgbClr val="1750EB"/>
+                </a:solidFill>
+                <a:latin typeface="JetBrains Mono"/>
+                <a:ea typeface="JetBrains Mono"/>
+                <a:cs typeface="JetBrains Mono"/>
+              </a:rPr>
+              <a:t>randrange()</a:t>
+            </a:r>
+            <a:r>
+              <a:rPr sz="2400" b="0">
+                <a:solidFill>
+                  <a:srgbClr val="080808"/>
+                </a:solidFill>
+                <a:latin typeface="Calibri"/>
+                <a:ea typeface="Calibri"/>
+                <a:cs typeface="Calibri"/>
+              </a:rPr>
+              <a:t> to generate one of these whole numbers: 5, 10, 15, 20, 25 or 30. Store the result in [move] and display </a:t>
+            </a:r>
+            <a:r>
+              <a:rPr sz="2400" b="0">
+                <a:solidFill>
+                  <a:srgbClr val="067D17"/>
+                </a:solidFill>
+                <a:latin typeface="JetBrains Mono"/>
+                <a:ea typeface="JetBrains Mono"/>
+                <a:cs typeface="JetBrains Mono"/>
+              </a:rPr>
+              <a:t>"Move:"</a:t>
+            </a:r>
+            <a:r>
+              <a:rPr sz="2400" b="0">
+                <a:solidFill>
+                  <a:srgbClr val="080808"/>
+                </a:solidFill>
+                <a:latin typeface="Calibri"/>
+                <a:ea typeface="Calibri"/>
+                <a:cs typeface="Calibri"/>
+              </a:rPr>
+              <a:t> followed by [move]. Run the program several times and check that no other number appears.</a:t>
             </a:r>
           </a:p>
         </p:txBody>
@@ -7424,7 +7468,117 @@
                 <a:ea typeface="Calibri"/>
                 <a:cs typeface="Calibri"/>
               </a:rPr>
-              <a:t> to the colour choices and generate two independently stored colour selections. Display both selections on labelled lines.</a:t>
+              <a:t> to [colours]. Use </a:t>
+            </a:r>
+            <a:r>
+              <a:rPr sz="2400" b="0">
+                <a:solidFill>
+                  <a:srgbClr val="1750EB"/>
+                </a:solidFill>
+                <a:latin typeface="JetBrains Mono"/>
+                <a:ea typeface="JetBrains Mono"/>
+                <a:cs typeface="JetBrains Mono"/>
+              </a:rPr>
+              <a:t>random.choice()</a:t>
+            </a:r>
+            <a:r>
+              <a:rPr sz="2400" b="0">
+                <a:solidFill>
+                  <a:srgbClr val="080808"/>
+                </a:solidFill>
+                <a:latin typeface="Calibri"/>
+                <a:ea typeface="Calibri"/>
+                <a:cs typeface="Calibri"/>
+              </a:rPr>
+              <a:t> twice and store the results separately in [first_colour] and [second_colour]. Display each result on a labelled line. For example, if </a:t>
+            </a:r>
+            <a:r>
+              <a:rPr sz="2400" b="0">
+                <a:solidFill>
+                  <a:srgbClr val="067D17"/>
+                </a:solidFill>
+                <a:latin typeface="JetBrains Mono"/>
+                <a:ea typeface="JetBrains Mono"/>
+                <a:cs typeface="JetBrains Mono"/>
+              </a:rPr>
+              <a:t>"red"</a:t>
+            </a:r>
+            <a:r>
+              <a:rPr sz="2400" b="0">
+                <a:solidFill>
+                  <a:srgbClr val="080808"/>
+                </a:solidFill>
+                <a:latin typeface="Calibri"/>
+                <a:ea typeface="Calibri"/>
+                <a:cs typeface="Calibri"/>
+              </a:rPr>
+              <a:t> and </a:t>
+            </a:r>
+            <a:r>
+              <a:rPr sz="2400" b="0">
+                <a:solidFill>
+                  <a:srgbClr val="067D17"/>
+                </a:solidFill>
+                <a:latin typeface="JetBrains Mono"/>
+                <a:ea typeface="JetBrains Mono"/>
+                <a:cs typeface="JetBrains Mono"/>
+              </a:rPr>
+              <a:t>"green"</a:t>
+            </a:r>
+            <a:r>
+              <a:rPr sz="2400" b="0">
+                <a:solidFill>
+                  <a:srgbClr val="080808"/>
+                </a:solidFill>
+                <a:latin typeface="Calibri"/>
+                <a:ea typeface="Calibri"/>
+                <a:cs typeface="Calibri"/>
+              </a:rPr>
+              <a:t> are selected, display </a:t>
+            </a:r>
+            <a:r>
+              <a:rPr sz="2400" b="0">
+                <a:solidFill>
+                  <a:srgbClr val="067D17"/>
+                </a:solidFill>
+                <a:latin typeface="JetBrains Mono"/>
+                <a:ea typeface="JetBrains Mono"/>
+                <a:cs typeface="JetBrains Mono"/>
+              </a:rPr>
+              <a:t>"First colour: red"</a:t>
+            </a:r>
+            <a:r>
+              <a:rPr sz="2400" b="0">
+                <a:solidFill>
+                  <a:srgbClr val="080808"/>
+                </a:solidFill>
+                <a:latin typeface="Calibri"/>
+                <a:ea typeface="Calibri"/>
+                <a:cs typeface="Calibri"/>
+              </a:rPr>
+              <a:t> and </a:t>
+            </a:r>
+            <a:r>
+              <a:rPr sz="2400" b="0">
+                <a:solidFill>
+                  <a:srgbClr val="067D17"/>
+                </a:solidFill>
+                <a:latin typeface="JetBrains Mono"/>
+                <a:ea typeface="JetBrains Mono"/>
+                <a:cs typeface="JetBrains Mono"/>
+              </a:rPr>
+              <a:t>"Second colour: green"</a:t>
+            </a:r>
+            <a:r>
+              <a:rPr sz="2400" b="0">
+                <a:solidFill>
+                  <a:srgbClr val="080808"/>
+                </a:solidFill>
+                <a:latin typeface="Calibri"/>
+                <a:ea typeface="Calibri"/>
+                <a:cs typeface="Calibri"/>
+              </a:rPr>
+              <a:t>.</a:t>
             </a:r>
           </a:p>
         </p:txBody>
@@ -7963,7 +8117,7 @@
         </p:spPr>
         <p:txBody>
           <a:bodyPr xmlns:a="http://schemas.openxmlformats.org/drawingml/2006/main">
-            <a:normAutofit fontScale="100000"/>
+            <a:normAutofit fontScale="87835"/>
           </a:bodyPr>
           <a:lstStyle xmlns:a="http://schemas.openxmlformats.org/drawingml/2006/main"/>
           <a:p xmlns:a="http://schemas.openxmlformats.org/drawingml/2006/main">
@@ -7982,7 +8136,7 @@
                 <a:ea typeface="Calibri"/>
                 <a:cs typeface="Calibri"/>
               </a:rPr>
-              <a:t>Build a random training prompt. Choose an even repetition count from 2 through 12 and one activity from a three-item </a:t>
+              <a:t>Store three activity </a:t>
             </a:r>
             <a:r>
               <a:rPr sz="2400" b="0">
@@ -7993,7 +8147,7 @@
                 <a:ea typeface="JetBrains Mono"/>
                 <a:cs typeface="JetBrains Mono"/>
               </a:rPr>
-              <a:t>list</a:t>
+              <a:t>strings</a:t>
             </a:r>
             <a:r>
               <a:rPr sz="2400" b="0">
@@ -8004,7 +8158,139 @@
                 <a:ea typeface="Calibri"/>
                 <a:cs typeface="Calibri"/>
               </a:rPr>
-              <a:t> you design. Display one instruction such as 8 jumps.</a:t>
+              <a:t>, such as </a:t>
+            </a:r>
+            <a:r>
+              <a:rPr sz="2400" b="0">
+                <a:solidFill>
+                  <a:srgbClr val="067D17"/>
+                </a:solidFill>
+                <a:latin typeface="JetBrains Mono"/>
+                <a:ea typeface="JetBrains Mono"/>
+                <a:cs typeface="JetBrains Mono"/>
+              </a:rPr>
+              <a:t>"jumps"</a:t>
+            </a:r>
+            <a:r>
+              <a:rPr sz="2400" b="0">
+                <a:solidFill>
+                  <a:srgbClr val="080808"/>
+                </a:solidFill>
+                <a:latin typeface="Calibri"/>
+                <a:ea typeface="Calibri"/>
+                <a:cs typeface="Calibri"/>
+              </a:rPr>
+              <a:t>, </a:t>
+            </a:r>
+            <a:r>
+              <a:rPr sz="2400" b="0">
+                <a:solidFill>
+                  <a:srgbClr val="067D17"/>
+                </a:solidFill>
+                <a:latin typeface="JetBrains Mono"/>
+                <a:ea typeface="JetBrains Mono"/>
+                <a:cs typeface="JetBrains Mono"/>
+              </a:rPr>
+              <a:t>"push-ups"</a:t>
+            </a:r>
+            <a:r>
+              <a:rPr sz="2400" b="0">
+                <a:solidFill>
+                  <a:srgbClr val="080808"/>
+                </a:solidFill>
+                <a:latin typeface="Calibri"/>
+                <a:ea typeface="Calibri"/>
+                <a:cs typeface="Calibri"/>
+              </a:rPr>
+              <a:t> and </a:t>
+            </a:r>
+            <a:r>
+              <a:rPr sz="2400" b="0">
+                <a:solidFill>
+                  <a:srgbClr val="067D17"/>
+                </a:solidFill>
+                <a:latin typeface="JetBrains Mono"/>
+                <a:ea typeface="JetBrains Mono"/>
+                <a:cs typeface="JetBrains Mono"/>
+              </a:rPr>
+              <a:t>"squats"</a:t>
+            </a:r>
+            <a:r>
+              <a:rPr sz="2400" b="0">
+                <a:solidFill>
+                  <a:srgbClr val="080808"/>
+                </a:solidFill>
+                <a:latin typeface="Calibri"/>
+                <a:ea typeface="Calibri"/>
+                <a:cs typeface="Calibri"/>
+              </a:rPr>
+              <a:t>, in [activities]. Generate a random even whole number from 2 through 12 and store it in [count]. Select one random item from [activities] and store it in [activity]. Display </a:t>
+            </a:r>
+            <a:r>
+              <a:rPr sz="2400" b="0">
+                <a:solidFill>
+                  <a:srgbClr val="067D17"/>
+                </a:solidFill>
+                <a:latin typeface="JetBrains Mono"/>
+                <a:ea typeface="JetBrains Mono"/>
+                <a:cs typeface="JetBrains Mono"/>
+              </a:rPr>
+              <a:t>"Training prompt:"</a:t>
+            </a:r>
+            <a:r>
+              <a:rPr sz="2400" b="0">
+                <a:solidFill>
+                  <a:srgbClr val="080808"/>
+                </a:solidFill>
+                <a:latin typeface="Calibri"/>
+                <a:ea typeface="Calibri"/>
+                <a:cs typeface="Calibri"/>
+              </a:rPr>
+              <a:t> followed by [count] and [activity], such as </a:t>
+            </a:r>
+            <a:r>
+              <a:rPr sz="2400" b="0">
+                <a:solidFill>
+                  <a:srgbClr val="067D17"/>
+                </a:solidFill>
+                <a:latin typeface="JetBrains Mono"/>
+                <a:ea typeface="JetBrains Mono"/>
+                <a:cs typeface="JetBrains Mono"/>
+              </a:rPr>
+              <a:t>"Training prompt: 8 jumps"</a:t>
+            </a:r>
+            <a:r>
+              <a:rPr sz="2400" b="0">
+                <a:solidFill>
+                  <a:srgbClr val="080808"/>
+                </a:solidFill>
+                <a:latin typeface="Calibri"/>
+                <a:ea typeface="Calibri"/>
+                <a:cs typeface="Calibri"/>
+              </a:rPr>
+              <a:t> or </a:t>
+            </a:r>
+            <a:r>
+              <a:rPr sz="2400" b="0">
+                <a:solidFill>
+                  <a:srgbClr val="067D17"/>
+                </a:solidFill>
+                <a:latin typeface="JetBrains Mono"/>
+                <a:ea typeface="JetBrains Mono"/>
+                <a:cs typeface="JetBrains Mono"/>
+              </a:rPr>
+              <a:t>"Training prompt: 4 push-ups"</a:t>
+            </a:r>
+            <a:r>
+              <a:rPr sz="2400" b="0">
+                <a:solidFill>
+                  <a:srgbClr val="080808"/>
+                </a:solidFill>
+                <a:latin typeface="Calibri"/>
+                <a:ea typeface="Calibri"/>
+                <a:cs typeface="Calibri"/>
+              </a:rPr>
+              <a:t>.</a:t>
             </a:r>
           </a:p>
         </p:txBody>

--- a/Mapped Curriculum Lessons/Grade 7/Lesson 19 - Random Steps and Choices/Random Steps and Choices - Slides.pptx
+++ b/Mapped Curriculum Lessons/Grade 7/Lesson 19 - Random Steps and Choices/Random Steps and Choices - Slides.pptx
@@ -2,28 +2,28 @@
 <file path=ppt/presentation.xml><?xml version="1.0" encoding="utf-8"?>
 <p:presentation xmlns:p="http://schemas.openxmlformats.org/presentationml/2006/main" embedTrueTypeFonts="1" saveSubsetFonts="0">
   <p:sldMasterIdLst>
-    <p:sldMasterId xmlns:r="http://schemas.openxmlformats.org/officeDocument/2006/relationships" id="2147483648" r:id="R970296e8e35d4c29"/>
+    <p:sldMasterId xmlns:r="http://schemas.openxmlformats.org/officeDocument/2006/relationships" id="2147483648" r:id="R756067898e1d42d8"/>
   </p:sldMasterIdLst>
   <p:notesMasterIdLst>
-    <p:notesMasterId xmlns:r="http://schemas.openxmlformats.org/officeDocument/2006/relationships" r:id="R961912db1bd14942"/>
+    <p:notesMasterId xmlns:r="http://schemas.openxmlformats.org/officeDocument/2006/relationships" r:id="Ra49493f38a464b2b"/>
   </p:notesMasterIdLst>
   <p:sldIdLst>
-    <p:sldId xmlns:r="http://schemas.openxmlformats.org/officeDocument/2006/relationships" id="256" r:id="Rb49ff554c0024b40"/>
-    <p:sldId xmlns:r="http://schemas.openxmlformats.org/officeDocument/2006/relationships" id="257" r:id="R6da791c9cb674da2"/>
-    <p:sldId xmlns:r="http://schemas.openxmlformats.org/officeDocument/2006/relationships" id="258" r:id="R80caaee266194d9c"/>
-    <p:sldId xmlns:r="http://schemas.openxmlformats.org/officeDocument/2006/relationships" id="259" r:id="Rbbb806dbc81b467a"/>
-    <p:sldId xmlns:r="http://schemas.openxmlformats.org/officeDocument/2006/relationships" id="260" r:id="R52533a870cef4f24"/>
-    <p:sldId xmlns:r="http://schemas.openxmlformats.org/officeDocument/2006/relationships" id="261" r:id="Rc8cdbcce8d694435"/>
-    <p:sldId xmlns:r="http://schemas.openxmlformats.org/officeDocument/2006/relationships" id="262" r:id="Ra6c0fe9eabc94fb5"/>
-    <p:sldId xmlns:r="http://schemas.openxmlformats.org/officeDocument/2006/relationships" id="263" r:id="R9355b88a2ee24b6e"/>
-    <p:sldId xmlns:r="http://schemas.openxmlformats.org/officeDocument/2006/relationships" id="264" r:id="R7beeb3a0aa534d89"/>
+    <p:sldId xmlns:r="http://schemas.openxmlformats.org/officeDocument/2006/relationships" id="256" r:id="R8ddaa9a0f12048a9"/>
+    <p:sldId xmlns:r="http://schemas.openxmlformats.org/officeDocument/2006/relationships" id="257" r:id="R3106082936e7428c"/>
+    <p:sldId xmlns:r="http://schemas.openxmlformats.org/officeDocument/2006/relationships" id="258" r:id="R400f031257b14236"/>
+    <p:sldId xmlns:r="http://schemas.openxmlformats.org/officeDocument/2006/relationships" id="259" r:id="R368107698a9a4c95"/>
+    <p:sldId xmlns:r="http://schemas.openxmlformats.org/officeDocument/2006/relationships" id="260" r:id="R117429da9507444f"/>
+    <p:sldId xmlns:r="http://schemas.openxmlformats.org/officeDocument/2006/relationships" id="261" r:id="Rc3db4a3598cb42d9"/>
+    <p:sldId xmlns:r="http://schemas.openxmlformats.org/officeDocument/2006/relationships" id="262" r:id="Rb49ebafba4b44ef5"/>
+    <p:sldId xmlns:r="http://schemas.openxmlformats.org/officeDocument/2006/relationships" id="263" r:id="Rb61ec19d74ab4c1f"/>
+    <p:sldId xmlns:r="http://schemas.openxmlformats.org/officeDocument/2006/relationships" id="264" r:id="Re8b4fd1cec99410f"/>
   </p:sldIdLst>
   <p:sldSz cx="12192000" cy="6858000"/>
   <p:notesSz cx="6858000" cy="9144000"/>
   <p:embeddedFontLst>
     <p:embeddedFont>
       <p:font typeface="JetBrains Mono"/>
-      <p:regular xmlns:r="http://schemas.openxmlformats.org/officeDocument/2006/relationships" r:id="R9bf9910fa51a43f4"/>
+      <p:regular xmlns:r="http://schemas.openxmlformats.org/officeDocument/2006/relationships" r:id="R39999b29a0d0444e"/>
     </p:embeddedFont>
   </p:embeddedFontLst>
 </p:presentation>
@@ -1071,7 +1071,7 @@
           <p:nvPr/>
         </p:nvPicPr>
         <p:blipFill rotWithShape="1">
-          <a:blip xmlns:r="http://schemas.openxmlformats.org/officeDocument/2006/relationships" xmlns:a="http://schemas.openxmlformats.org/drawingml/2006/main" r:embed="R28fabfdb5fee4803"/>
+          <a:blip xmlns:r="http://schemas.openxmlformats.org/officeDocument/2006/relationships" xmlns:a="http://schemas.openxmlformats.org/drawingml/2006/main" r:embed="Raf9736bd1c854b83"/>
           <a:stretch xmlns:a="http://schemas.openxmlformats.org/drawingml/2006/main"/>
         </p:blipFill>
         <p:spPr>
@@ -1451,7 +1451,7 @@
           <p:nvPr/>
         </p:nvPicPr>
         <p:blipFill rotWithShape="1">
-          <a:blip xmlns:r="http://schemas.openxmlformats.org/officeDocument/2006/relationships" xmlns:a="http://schemas.openxmlformats.org/drawingml/2006/main" r:embed="R75c37c347a724b1a">
+          <a:blip xmlns:r="http://schemas.openxmlformats.org/officeDocument/2006/relationships" xmlns:a="http://schemas.openxmlformats.org/drawingml/2006/main" r:embed="Rc9bf5064387c4c18">
             <a:alphaModFix amt="28000"/>
           </a:blip>
           <a:stretch xmlns:a="http://schemas.openxmlformats.org/drawingml/2006/main"/>
@@ -1664,7 +1664,7 @@
           <p:nvPr/>
         </p:nvPicPr>
         <p:blipFill rotWithShape="1">
-          <a:blip xmlns:r="http://schemas.openxmlformats.org/officeDocument/2006/relationships" xmlns:a="http://schemas.openxmlformats.org/drawingml/2006/main" r:embed="Rbfd18dd58eb2486f">
+          <a:blip xmlns:r="http://schemas.openxmlformats.org/officeDocument/2006/relationships" xmlns:a="http://schemas.openxmlformats.org/drawingml/2006/main" r:embed="Rd4ae46bc37b54ae1">
             <a:alphaModFix amt="28000"/>
           </a:blip>
           <a:stretch xmlns:a="http://schemas.openxmlformats.org/drawingml/2006/main"/>
@@ -1899,7 +1899,7 @@
           <p:nvPr/>
         </p:nvPicPr>
         <p:blipFill rotWithShape="1">
-          <a:blip xmlns:r="http://schemas.openxmlformats.org/officeDocument/2006/relationships" xmlns:a="http://schemas.openxmlformats.org/drawingml/2006/main" r:embed="Rb1f362e2d2a447bb">
+          <a:blip xmlns:r="http://schemas.openxmlformats.org/officeDocument/2006/relationships" xmlns:a="http://schemas.openxmlformats.org/drawingml/2006/main" r:embed="Ra5305435757448e4">
             <a:alphaModFix amt="28000"/>
           </a:blip>
           <a:stretch xmlns:a="http://schemas.openxmlformats.org/drawingml/2006/main"/>
@@ -2176,7 +2176,7 @@
           <p:nvPr/>
         </p:nvPicPr>
         <p:blipFill rotWithShape="1">
-          <a:blip xmlns:r="http://schemas.openxmlformats.org/officeDocument/2006/relationships" xmlns:a="http://schemas.openxmlformats.org/drawingml/2006/main" r:embed="Rdd334c1c094c413c">
+          <a:blip xmlns:r="http://schemas.openxmlformats.org/officeDocument/2006/relationships" xmlns:a="http://schemas.openxmlformats.org/drawingml/2006/main" r:embed="R1765b78eb5124579">
             <a:alphaModFix amt="28000"/>
           </a:blip>
           <a:stretch xmlns:a="http://schemas.openxmlformats.org/drawingml/2006/main"/>
@@ -2451,7 +2451,7 @@
           <p:nvPr/>
         </p:nvPicPr>
         <p:blipFill rotWithShape="1">
-          <a:blip xmlns:r="http://schemas.openxmlformats.org/officeDocument/2006/relationships" xmlns:a="http://schemas.openxmlformats.org/drawingml/2006/main" r:embed="Rf831aee9ded04681">
+          <a:blip xmlns:r="http://schemas.openxmlformats.org/officeDocument/2006/relationships" xmlns:a="http://schemas.openxmlformats.org/drawingml/2006/main" r:embed="R876799b9429649c6">
             <a:alphaModFix amt="28000"/>
           </a:blip>
           <a:stretch xmlns:a="http://schemas.openxmlformats.org/drawingml/2006/main"/>
@@ -2875,7 +2875,7 @@
           <p:nvPr/>
         </p:nvPicPr>
         <p:blipFill rotWithShape="1">
-          <a:blip xmlns:r="http://schemas.openxmlformats.org/officeDocument/2006/relationships" xmlns:a="http://schemas.openxmlformats.org/drawingml/2006/main" r:embed="R6a9d03e3c0be4b40">
+          <a:blip xmlns:r="http://schemas.openxmlformats.org/officeDocument/2006/relationships" xmlns:a="http://schemas.openxmlformats.org/drawingml/2006/main" r:embed="R39b4ab02b6b545bc">
             <a:alphaModFix amt="28000"/>
           </a:blip>
           <a:stretch xmlns:a="http://schemas.openxmlformats.org/drawingml/2006/main"/>
@@ -3016,7 +3016,7 @@
           <p:nvPr/>
         </p:nvPicPr>
         <p:blipFill rotWithShape="1">
-          <a:blip xmlns:r="http://schemas.openxmlformats.org/officeDocument/2006/relationships" xmlns:a="http://schemas.openxmlformats.org/drawingml/2006/main" r:embed="R41d22a01c72b40c1">
+          <a:blip xmlns:r="http://schemas.openxmlformats.org/officeDocument/2006/relationships" xmlns:a="http://schemas.openxmlformats.org/drawingml/2006/main" r:embed="R1990b77c0137452c">
             <a:alphaModFix amt="28000"/>
           </a:blip>
           <a:stretch xmlns:a="http://schemas.openxmlformats.org/drawingml/2006/main"/>
@@ -3130,7 +3130,7 @@
           <p:nvPr/>
         </p:nvPicPr>
         <p:blipFill rotWithShape="1">
-          <a:blip xmlns:r="http://schemas.openxmlformats.org/officeDocument/2006/relationships" xmlns:a="http://schemas.openxmlformats.org/drawingml/2006/main" r:embed="R7a112827065c4188">
+          <a:blip xmlns:r="http://schemas.openxmlformats.org/officeDocument/2006/relationships" xmlns:a="http://schemas.openxmlformats.org/drawingml/2006/main" r:embed="Rccc988a151cf488d">
             <a:alphaModFix amt="28000"/>
           </a:blip>
           <a:stretch xmlns:a="http://schemas.openxmlformats.org/drawingml/2006/main"/>
@@ -3457,7 +3457,7 @@
           <p:nvPr/>
         </p:nvPicPr>
         <p:blipFill rotWithShape="1">
-          <a:blip xmlns:r="http://schemas.openxmlformats.org/officeDocument/2006/relationships" xmlns:a="http://schemas.openxmlformats.org/drawingml/2006/main" r:embed="R57f88b818d7e4b28">
+          <a:blip xmlns:r="http://schemas.openxmlformats.org/officeDocument/2006/relationships" xmlns:a="http://schemas.openxmlformats.org/drawingml/2006/main" r:embed="R3a4f8dae8a9b493d">
             <a:alphaModFix amt="28000"/>
           </a:blip>
           <a:stretch xmlns:a="http://schemas.openxmlformats.org/drawingml/2006/main"/>
@@ -3745,7 +3745,7 @@
           <p:nvPr/>
         </p:nvPicPr>
         <p:blipFill rotWithShape="1">
-          <a:blip xmlns:r="http://schemas.openxmlformats.org/officeDocument/2006/relationships" xmlns:a="http://schemas.openxmlformats.org/drawingml/2006/main" r:embed="Rb38373d7f7b343ae">
+          <a:blip xmlns:r="http://schemas.openxmlformats.org/officeDocument/2006/relationships" xmlns:a="http://schemas.openxmlformats.org/drawingml/2006/main" r:embed="Rc5244c083b8a42c4">
             <a:alphaModFix amt="28000"/>
           </a:blip>
           <a:stretch xmlns:a="http://schemas.openxmlformats.org/drawingml/2006/main"/>
@@ -3982,17 +3982,17 @@
   </p:cSld>
   <p:clrMap bg1="lt1" tx1="dk1" bg2="lt2" tx2="dk2" accent1="accent1" accent2="accent2" accent3="accent3" accent4="accent4" accent5="accent5" accent6="accent6" hlink="hlink" folHlink="folHlink"/>
   <p:sldLayoutIdLst>
-    <p:sldLayoutId xmlns:r="http://schemas.openxmlformats.org/officeDocument/2006/relationships" id="2147483649" r:id="R71861728d68a46b9"/>
-    <p:sldLayoutId xmlns:r="http://schemas.openxmlformats.org/officeDocument/2006/relationships" id="2147483650" r:id="Rb1879614b10f4423"/>
-    <p:sldLayoutId xmlns:r="http://schemas.openxmlformats.org/officeDocument/2006/relationships" id="2147483651" r:id="R94791b3bdf294a2b"/>
-    <p:sldLayoutId xmlns:r="http://schemas.openxmlformats.org/officeDocument/2006/relationships" id="2147483652" r:id="R3f0ec24086054ab5"/>
-    <p:sldLayoutId xmlns:r="http://schemas.openxmlformats.org/officeDocument/2006/relationships" id="2147483653" r:id="R8679542a9b884a15"/>
-    <p:sldLayoutId xmlns:r="http://schemas.openxmlformats.org/officeDocument/2006/relationships" id="2147483654" r:id="Rc2b853fa248e4904"/>
-    <p:sldLayoutId xmlns:r="http://schemas.openxmlformats.org/officeDocument/2006/relationships" id="2147483655" r:id="Rc1baa2ef35f8418f"/>
-    <p:sldLayoutId xmlns:r="http://schemas.openxmlformats.org/officeDocument/2006/relationships" id="2147483656" r:id="R72b5d8d288af40be"/>
-    <p:sldLayoutId xmlns:r="http://schemas.openxmlformats.org/officeDocument/2006/relationships" id="2147483657" r:id="R968e81c1658d4d6e"/>
-    <p:sldLayoutId xmlns:r="http://schemas.openxmlformats.org/officeDocument/2006/relationships" id="2147483658" r:id="R351a56b2a9a74763"/>
-    <p:sldLayoutId xmlns:r="http://schemas.openxmlformats.org/officeDocument/2006/relationships" id="2147483659" r:id="R7a80e5418d564e57"/>
+    <p:sldLayoutId xmlns:r="http://schemas.openxmlformats.org/officeDocument/2006/relationships" id="2147483649" r:id="R535150d9bbc24df4"/>
+    <p:sldLayoutId xmlns:r="http://schemas.openxmlformats.org/officeDocument/2006/relationships" id="2147483650" r:id="R842aaee4b7544172"/>
+    <p:sldLayoutId xmlns:r="http://schemas.openxmlformats.org/officeDocument/2006/relationships" id="2147483651" r:id="R80546083cdb245b5"/>
+    <p:sldLayoutId xmlns:r="http://schemas.openxmlformats.org/officeDocument/2006/relationships" id="2147483652" r:id="Rc07df39f8cd34650"/>
+    <p:sldLayoutId xmlns:r="http://schemas.openxmlformats.org/officeDocument/2006/relationships" id="2147483653" r:id="R9963fc57c3864d4a"/>
+    <p:sldLayoutId xmlns:r="http://schemas.openxmlformats.org/officeDocument/2006/relationships" id="2147483654" r:id="Rf9284783edb34535"/>
+    <p:sldLayoutId xmlns:r="http://schemas.openxmlformats.org/officeDocument/2006/relationships" id="2147483655" r:id="R592959e1f76b4a5e"/>
+    <p:sldLayoutId xmlns:r="http://schemas.openxmlformats.org/officeDocument/2006/relationships" id="2147483656" r:id="Rca1bbc242b63495c"/>
+    <p:sldLayoutId xmlns:r="http://schemas.openxmlformats.org/officeDocument/2006/relationships" id="2147483657" r:id="R1ea09b4067644d7f"/>
+    <p:sldLayoutId xmlns:r="http://schemas.openxmlformats.org/officeDocument/2006/relationships" id="2147483658" r:id="R35b717b8bc58406d"/>
+    <p:sldLayoutId xmlns:r="http://schemas.openxmlformats.org/officeDocument/2006/relationships" id="2147483659" r:id="R87cee670a18c4694"/>
   </p:sldLayoutIdLst>
   <p:hf hdr="0" ftr="0" dt="0"/>
   <p:txStyles>
@@ -6844,10 +6844,10 @@
                 <a:ea typeface="Calibri"/>
                 <a:cs typeface="Calibri"/>
               </a:rPr>
-              <a:t>Use </a:t>
-            </a:r>
-            <a:r>
-              <a:rPr sz="2400" b="0">
+              <a:t>Change the example's </a:t>
+            </a:r>
+            <a:r>
+              <a:rPr sz="2050" b="0">
                 <a:solidFill>
                   <a:srgbClr val="1750EB"/>
                 </a:solidFill>
@@ -6855,7 +6855,7 @@
                 <a:ea typeface="JetBrains Mono"/>
                 <a:cs typeface="JetBrains Mono"/>
               </a:rPr>
-              <a:t>randrange()</a:t>
+              <a:t>random.randrange()</a:t>
             </a:r>
             <a:r>
               <a:rPr sz="2400" b="0">
@@ -6866,18 +6866,21 @@
                 <a:ea typeface="Calibri"/>
                 <a:cs typeface="Calibri"/>
               </a:rPr>
-              <a:t> to generate one of these whole numbers: 5, 10, 15, 20, 25 or 30. Store the result in [move] and display </a:t>
-            </a:r>
-            <a:r>
-              <a:rPr sz="2400" b="0">
-                <a:solidFill>
-                  <a:srgbClr val="067D17"/>
-                </a:solidFill>
-                <a:latin typeface="JetBrains Mono"/>
-                <a:ea typeface="JetBrains Mono"/>
-                <a:cs typeface="JetBrains Mono"/>
-              </a:rPr>
-              <a:t>"Move:"</a:t>
+              <a:t> call so it chooses one of 5, 10, 15, 20, 25 or 30. Store the result in </a:t>
+            </a:r>
+            <a:r>
+              <a:rPr sz="2050" b="0">
+                <a:solidFill>
+                  <a:srgbClr val="6A1B9A"/>
+                </a:solidFill>
+                <a:highlight>
+                  <a:srgbClr val="ECEAF4"/>
+                </a:highlight>
+                <a:latin typeface="JetBrains Mono"/>
+                <a:ea typeface="JetBrains Mono"/>
+                <a:cs typeface="JetBrains Mono"/>
+              </a:rPr>
+              <a:t> move </a:t>
             </a:r>
             <a:r>
               <a:rPr sz="2400" b="0">
@@ -6888,7 +6891,29 @@
                 <a:ea typeface="Calibri"/>
                 <a:cs typeface="Calibri"/>
               </a:rPr>
-              <a:t> followed by [move]. Run the program several times and check that no other number appears.</a:t>
+              <a:t> and display it after </a:t>
+            </a:r>
+            <a:r>
+              <a:rPr sz="2050" b="0">
+                <a:solidFill>
+                  <a:srgbClr val="067D17"/>
+                </a:solidFill>
+                <a:latin typeface="JetBrains Mono"/>
+                <a:ea typeface="JetBrains Mono"/>
+                <a:cs typeface="JetBrains Mono"/>
+              </a:rPr>
+              <a:t>"Move:"</a:t>
+            </a:r>
+            <a:r>
+              <a:rPr sz="2400" b="0">
+                <a:solidFill>
+                  <a:srgbClr val="080808"/>
+                </a:solidFill>
+                <a:latin typeface="Calibri"/>
+                <a:ea typeface="Calibri"/>
+                <a:cs typeface="Calibri"/>
+              </a:rPr>
+              <a:t>. Run it several times to check that no other number appears.</a:t>
             </a:r>
           </a:p>
         </p:txBody>
@@ -7446,18 +7471,18 @@
                 <a:ea typeface="Calibri"/>
                 <a:cs typeface="Calibri"/>
               </a:rPr>
-              <a:t>Add </a:t>
-            </a:r>
-            <a:r>
-              <a:rPr sz="2400" b="0">
-                <a:solidFill>
-                  <a:srgbClr val="067D17"/>
-                </a:solidFill>
-                <a:latin typeface="JetBrains Mono"/>
-                <a:ea typeface="JetBrains Mono"/>
-                <a:cs typeface="JetBrains Mono"/>
-              </a:rPr>
-              <a:t>"green"</a:t>
+              <a:t>Change the example so a </a:t>
+            </a:r>
+            <a:r>
+              <a:rPr sz="2050" b="0">
+                <a:solidFill>
+                  <a:srgbClr val="1750EB"/>
+                </a:solidFill>
+                <a:latin typeface="JetBrains Mono"/>
+                <a:ea typeface="JetBrains Mono"/>
+                <a:cs typeface="JetBrains Mono"/>
+              </a:rPr>
+              <a:t>list</a:t>
             </a:r>
             <a:r>
               <a:rPr sz="2400" b="0">
@@ -7468,18 +7493,21 @@
                 <a:ea typeface="Calibri"/>
                 <a:cs typeface="Calibri"/>
               </a:rPr>
-              <a:t> to [colours]. Use </a:t>
-            </a:r>
-            <a:r>
-              <a:rPr sz="2400" b="0">
-                <a:solidFill>
-                  <a:srgbClr val="1750EB"/>
-                </a:solidFill>
-                <a:latin typeface="JetBrains Mono"/>
-                <a:ea typeface="JetBrains Mono"/>
-                <a:cs typeface="JetBrains Mono"/>
-              </a:rPr>
-              <a:t>random.choice()</a:t>
+              <a:t> called </a:t>
+            </a:r>
+            <a:r>
+              <a:rPr sz="2050" b="0">
+                <a:solidFill>
+                  <a:srgbClr val="6A1B9A"/>
+                </a:solidFill>
+                <a:highlight>
+                  <a:srgbClr val="ECEAF4"/>
+                </a:highlight>
+                <a:latin typeface="JetBrains Mono"/>
+                <a:ea typeface="JetBrains Mono"/>
+                <a:cs typeface="JetBrains Mono"/>
+              </a:rPr>
+              <a:t> colours </a:t>
             </a:r>
             <a:r>
               <a:rPr sz="2400" b="0">
@@ -7490,10 +7518,10 @@
                 <a:ea typeface="Calibri"/>
                 <a:cs typeface="Calibri"/>
               </a:rPr>
-              <a:t> twice and store the results separately in [first_colour] and [second_colour]. Display each result on a labelled line. For example, if </a:t>
-            </a:r>
-            <a:r>
-              <a:rPr sz="2400" b="0">
+              <a:t> holds </a:t>
+            </a:r>
+            <a:r>
+              <a:rPr sz="2050" b="0">
                 <a:solidFill>
                   <a:srgbClr val="067D17"/>
                 </a:solidFill>
@@ -7512,10 +7540,10 @@
                 <a:ea typeface="Calibri"/>
                 <a:cs typeface="Calibri"/>
               </a:rPr>
-              <a:t> and </a:t>
-            </a:r>
-            <a:r>
-              <a:rPr sz="2400" b="0">
+              <a:t>, </a:t>
+            </a:r>
+            <a:r>
+              <a:rPr sz="2050" b="0">
                 <a:solidFill>
                   <a:srgbClr val="067D17"/>
                 </a:solidFill>
@@ -7523,7 +7551,7 @@
                 <a:ea typeface="JetBrains Mono"/>
                 <a:cs typeface="JetBrains Mono"/>
               </a:rPr>
-              <a:t>"green"</a:t>
+              <a:t>"blue"</a:t>
             </a:r>
             <a:r>
               <a:rPr sz="2400" b="0">
@@ -7534,10 +7562,10 @@
                 <a:ea typeface="Calibri"/>
                 <a:cs typeface="Calibri"/>
               </a:rPr>
-              <a:t> are selected, display </a:t>
-            </a:r>
-            <a:r>
-              <a:rPr sz="2400" b="0">
+              <a:t>, </a:t>
+            </a:r>
+            <a:r>
+              <a:rPr sz="2050" b="0">
                 <a:solidFill>
                   <a:srgbClr val="067D17"/>
                 </a:solidFill>
@@ -7545,7 +7573,7 @@
                 <a:ea typeface="JetBrains Mono"/>
                 <a:cs typeface="JetBrains Mono"/>
               </a:rPr>
-              <a:t>"First colour: red"</a:t>
+              <a:t>"gold"</a:t>
             </a:r>
             <a:r>
               <a:rPr sz="2400" b="0">
@@ -7559,15 +7587,131 @@
               <a:t> and </a:t>
             </a:r>
             <a:r>
+              <a:rPr sz="2050" b="0">
+                <a:solidFill>
+                  <a:srgbClr val="067D17"/>
+                </a:solidFill>
+                <a:latin typeface="JetBrains Mono"/>
+                <a:ea typeface="JetBrains Mono"/>
+                <a:cs typeface="JetBrains Mono"/>
+              </a:rPr>
+              <a:t>"green"</a:t>
+            </a:r>
+            <a:r>
               <a:rPr sz="2400" b="0">
                 <a:solidFill>
+                  <a:srgbClr val="080808"/>
+                </a:solidFill>
+                <a:latin typeface="Calibri"/>
+                <a:ea typeface="Calibri"/>
+                <a:cs typeface="Calibri"/>
+              </a:rPr>
+              <a:t>. Use </a:t>
+            </a:r>
+            <a:r>
+              <a:rPr sz="2050" b="0">
+                <a:solidFill>
+                  <a:srgbClr val="1750EB"/>
+                </a:solidFill>
+                <a:latin typeface="JetBrains Mono"/>
+                <a:ea typeface="JetBrains Mono"/>
+                <a:cs typeface="JetBrains Mono"/>
+              </a:rPr>
+              <a:t>random.choice()</a:t>
+            </a:r>
+            <a:r>
+              <a:rPr sz="2400" b="0">
+                <a:solidFill>
+                  <a:srgbClr val="080808"/>
+                </a:solidFill>
+                <a:latin typeface="Calibri"/>
+                <a:ea typeface="Calibri"/>
+                <a:cs typeface="Calibri"/>
+              </a:rPr>
+              <a:t> twice to pick </a:t>
+            </a:r>
+            <a:r>
+              <a:rPr sz="2050" b="0">
+                <a:solidFill>
+                  <a:srgbClr val="6A1B9A"/>
+                </a:solidFill>
+                <a:highlight>
+                  <a:srgbClr val="ECEAF4"/>
+                </a:highlight>
+                <a:latin typeface="JetBrains Mono"/>
+                <a:ea typeface="JetBrains Mono"/>
+                <a:cs typeface="JetBrains Mono"/>
+              </a:rPr>
+              <a:t> first_colour </a:t>
+            </a:r>
+            <a:r>
+              <a:rPr sz="2400" b="0">
+                <a:solidFill>
+                  <a:srgbClr val="080808"/>
+                </a:solidFill>
+                <a:latin typeface="Calibri"/>
+                <a:ea typeface="Calibri"/>
+                <a:cs typeface="Calibri"/>
+              </a:rPr>
+              <a:t> and </a:t>
+            </a:r>
+            <a:r>
+              <a:rPr sz="2050" b="0">
+                <a:solidFill>
+                  <a:srgbClr val="6A1B9A"/>
+                </a:solidFill>
+                <a:highlight>
+                  <a:srgbClr val="ECEAF4"/>
+                </a:highlight>
+                <a:latin typeface="JetBrains Mono"/>
+                <a:ea typeface="JetBrains Mono"/>
+                <a:cs typeface="JetBrains Mono"/>
+              </a:rPr>
+              <a:t> second_colour </a:t>
+            </a:r>
+            <a:r>
+              <a:rPr sz="2400" b="0">
+                <a:solidFill>
+                  <a:srgbClr val="080808"/>
+                </a:solidFill>
+                <a:latin typeface="Calibri"/>
+                <a:ea typeface="Calibri"/>
+                <a:cs typeface="Calibri"/>
+              </a:rPr>
+              <a:t>, and display them after </a:t>
+            </a:r>
+            <a:r>
+              <a:rPr sz="2050" b="0">
+                <a:solidFill>
                   <a:srgbClr val="067D17"/>
                 </a:solidFill>
                 <a:latin typeface="JetBrains Mono"/>
                 <a:ea typeface="JetBrains Mono"/>
                 <a:cs typeface="JetBrains Mono"/>
               </a:rPr>
-              <a:t>"Second colour: green"</a:t>
+              <a:t>"First colour:"</a:t>
+            </a:r>
+            <a:r>
+              <a:rPr sz="2400" b="0">
+                <a:solidFill>
+                  <a:srgbClr val="080808"/>
+                </a:solidFill>
+                <a:latin typeface="Calibri"/>
+                <a:ea typeface="Calibri"/>
+                <a:cs typeface="Calibri"/>
+              </a:rPr>
+              <a:t> and </a:t>
+            </a:r>
+            <a:r>
+              <a:rPr sz="2050" b="0">
+                <a:solidFill>
+                  <a:srgbClr val="067D17"/>
+                </a:solidFill>
+                <a:latin typeface="JetBrains Mono"/>
+                <a:ea typeface="JetBrains Mono"/>
+                <a:cs typeface="JetBrains Mono"/>
+              </a:rPr>
+              <a:t>"Second colour:"</a:t>
             </a:r>
             <a:r>
               <a:rPr sz="2400" b="0">
@@ -8117,7 +8261,7 @@
         </p:spPr>
         <p:txBody>
           <a:bodyPr xmlns:a="http://schemas.openxmlformats.org/drawingml/2006/main">
-            <a:normAutofit fontScale="87835"/>
+            <a:normAutofit fontScale="100000"/>
           </a:bodyPr>
           <a:lstStyle xmlns:a="http://schemas.openxmlformats.org/drawingml/2006/main"/>
           <a:p xmlns:a="http://schemas.openxmlformats.org/drawingml/2006/main">
@@ -8136,10 +8280,10 @@
                 <a:ea typeface="Calibri"/>
                 <a:cs typeface="Calibri"/>
               </a:rPr>
-              <a:t>Store three activity </a:t>
-            </a:r>
-            <a:r>
-              <a:rPr sz="2400" b="0">
+              <a:t>Create a training program with a </a:t>
+            </a:r>
+            <a:r>
+              <a:rPr sz="2050" b="0">
                 <a:solidFill>
                   <a:srgbClr val="1750EB"/>
                 </a:solidFill>
@@ -8147,7 +8291,7 @@
                 <a:ea typeface="JetBrains Mono"/>
                 <a:cs typeface="JetBrains Mono"/>
               </a:rPr>
-              <a:t>strings</a:t>
+              <a:t>list</a:t>
             </a:r>
             <a:r>
               <a:rPr sz="2400" b="0">
@@ -8158,18 +8302,21 @@
                 <a:ea typeface="Calibri"/>
                 <a:cs typeface="Calibri"/>
               </a:rPr>
-              <a:t>, such as </a:t>
-            </a:r>
-            <a:r>
-              <a:rPr sz="2400" b="0">
-                <a:solidFill>
-                  <a:srgbClr val="067D17"/>
-                </a:solidFill>
-                <a:latin typeface="JetBrains Mono"/>
-                <a:ea typeface="JetBrains Mono"/>
-                <a:cs typeface="JetBrains Mono"/>
-              </a:rPr>
-              <a:t>"jumps"</a:t>
+              <a:t> called </a:t>
+            </a:r>
+            <a:r>
+              <a:rPr sz="2050" b="0">
+                <a:solidFill>
+                  <a:srgbClr val="6A1B9A"/>
+                </a:solidFill>
+                <a:highlight>
+                  <a:srgbClr val="ECEAF4"/>
+                </a:highlight>
+                <a:latin typeface="JetBrains Mono"/>
+                <a:ea typeface="JetBrains Mono"/>
+                <a:cs typeface="JetBrains Mono"/>
+              </a:rPr>
+              <a:t> activities </a:t>
             </a:r>
             <a:r>
               <a:rPr sz="2400" b="0">
@@ -8180,18 +8327,18 @@
                 <a:ea typeface="Calibri"/>
                 <a:cs typeface="Calibri"/>
               </a:rPr>
-              <a:t>, </a:t>
-            </a:r>
-            <a:r>
-              <a:rPr sz="2400" b="0">
-                <a:solidFill>
-                  <a:srgbClr val="067D17"/>
-                </a:solidFill>
-                <a:latin typeface="JetBrains Mono"/>
-                <a:ea typeface="JetBrains Mono"/>
-                <a:cs typeface="JetBrains Mono"/>
-              </a:rPr>
-              <a:t>"push-ups"</a:t>
+              <a:t> holding three activity words. Use a </a:t>
+            </a:r>
+            <a:r>
+              <a:rPr sz="2050" b="0">
+                <a:solidFill>
+                  <a:srgbClr val="1750EB"/>
+                </a:solidFill>
+                <a:latin typeface="JetBrains Mono"/>
+                <a:ea typeface="JetBrains Mono"/>
+                <a:cs typeface="JetBrains Mono"/>
+              </a:rPr>
+              <a:t>for</a:t>
             </a:r>
             <a:r>
               <a:rPr sz="2400" b="0">
@@ -8202,18 +8349,18 @@
                 <a:ea typeface="Calibri"/>
                 <a:cs typeface="Calibri"/>
               </a:rPr>
-              <a:t> and </a:t>
-            </a:r>
-            <a:r>
-              <a:rPr sz="2400" b="0">
-                <a:solidFill>
-                  <a:srgbClr val="067D17"/>
-                </a:solidFill>
-                <a:latin typeface="JetBrains Mono"/>
-                <a:ea typeface="JetBrains Mono"/>
-                <a:cs typeface="JetBrains Mono"/>
-              </a:rPr>
-              <a:t>"squats"</a:t>
+              <a:t> loop to display three training prompts. Each prompt uses </a:t>
+            </a:r>
+            <a:r>
+              <a:rPr sz="2050" b="0">
+                <a:solidFill>
+                  <a:srgbClr val="1750EB"/>
+                </a:solidFill>
+                <a:latin typeface="JetBrains Mono"/>
+                <a:ea typeface="JetBrains Mono"/>
+                <a:cs typeface="JetBrains Mono"/>
+              </a:rPr>
+              <a:t>random.randrange()</a:t>
             </a:r>
             <a:r>
               <a:rPr sz="2400" b="0">
@@ -8224,18 +8371,18 @@
                 <a:ea typeface="Calibri"/>
                 <a:cs typeface="Calibri"/>
               </a:rPr>
-              <a:t>, in [activities]. Generate a random even whole number from 2 through 12 and store it in [count]. Select one random item from [activities] and store it in [activity]. Display </a:t>
-            </a:r>
-            <a:r>
-              <a:rPr sz="2400" b="0">
-                <a:solidFill>
-                  <a:srgbClr val="067D17"/>
-                </a:solidFill>
-                <a:latin typeface="JetBrains Mono"/>
-                <a:ea typeface="JetBrains Mono"/>
-                <a:cs typeface="JetBrains Mono"/>
-              </a:rPr>
-              <a:t>"Training prompt:"</a:t>
+              <a:t> for an even number from 2 to 12 and </a:t>
+            </a:r>
+            <a:r>
+              <a:rPr sz="2050" b="0">
+                <a:solidFill>
+                  <a:srgbClr val="1750EB"/>
+                </a:solidFill>
+                <a:latin typeface="JetBrains Mono"/>
+                <a:ea typeface="JetBrains Mono"/>
+                <a:cs typeface="JetBrains Mono"/>
+              </a:rPr>
+              <a:t>random.choice()</a:t>
             </a:r>
             <a:r>
               <a:rPr sz="2400" b="0">
@@ -8246,10 +8393,10 @@
                 <a:ea typeface="Calibri"/>
                 <a:cs typeface="Calibri"/>
               </a:rPr>
-              <a:t> followed by [count] and [activity], such as </a:t>
-            </a:r>
-            <a:r>
-              <a:rPr sz="2400" b="0">
+              <a:t> for an activity, such as </a:t>
+            </a:r>
+            <a:r>
+              <a:rPr sz="2050" b="0">
                 <a:solidFill>
                   <a:srgbClr val="067D17"/>
                 </a:solidFill>
@@ -8258,28 +8405,6 @@
                 <a:cs typeface="JetBrains Mono"/>
               </a:rPr>
               <a:t>"Training prompt: 8 jumps"</a:t>
-            </a:r>
-            <a:r>
-              <a:rPr sz="2400" b="0">
-                <a:solidFill>
-                  <a:srgbClr val="080808"/>
-                </a:solidFill>
-                <a:latin typeface="Calibri"/>
-                <a:ea typeface="Calibri"/>
-                <a:cs typeface="Calibri"/>
-              </a:rPr>
-              <a:t> or </a:t>
-            </a:r>
-            <a:r>
-              <a:rPr sz="2400" b="0">
-                <a:solidFill>
-                  <a:srgbClr val="067D17"/>
-                </a:solidFill>
-                <a:latin typeface="JetBrains Mono"/>
-                <a:ea typeface="JetBrains Mono"/>
-                <a:cs typeface="JetBrains Mono"/>
-              </a:rPr>
-              <a:t>"Training prompt: 4 push-ups"</a:t>
             </a:r>
             <a:r>
               <a:rPr sz="2400" b="0">

--- a/Mapped Curriculum Lessons/Grade 7/Lesson 19 - Random Steps and Choices/Random Steps and Choices - Slides.pptx
+++ b/Mapped Curriculum Lessons/Grade 7/Lesson 19 - Random Steps and Choices/Random Steps and Choices - Slides.pptx
@@ -2,28 +2,28 @@
 <file path=ppt/presentation.xml><?xml version="1.0" encoding="utf-8"?>
 <p:presentation xmlns:p="http://schemas.openxmlformats.org/presentationml/2006/main" embedTrueTypeFonts="1" saveSubsetFonts="0">
   <p:sldMasterIdLst>
-    <p:sldMasterId xmlns:r="http://schemas.openxmlformats.org/officeDocument/2006/relationships" id="2147483648" r:id="R756067898e1d42d8"/>
+    <p:sldMasterId xmlns:r="http://schemas.openxmlformats.org/officeDocument/2006/relationships" id="2147483648" r:id="R658c6588976641d8"/>
   </p:sldMasterIdLst>
   <p:notesMasterIdLst>
-    <p:notesMasterId xmlns:r="http://schemas.openxmlformats.org/officeDocument/2006/relationships" r:id="Ra49493f38a464b2b"/>
+    <p:notesMasterId xmlns:r="http://schemas.openxmlformats.org/officeDocument/2006/relationships" r:id="Ref5209d45dc0456e"/>
   </p:notesMasterIdLst>
   <p:sldIdLst>
-    <p:sldId xmlns:r="http://schemas.openxmlformats.org/officeDocument/2006/relationships" id="256" r:id="R8ddaa9a0f12048a9"/>
-    <p:sldId xmlns:r="http://schemas.openxmlformats.org/officeDocument/2006/relationships" id="257" r:id="R3106082936e7428c"/>
-    <p:sldId xmlns:r="http://schemas.openxmlformats.org/officeDocument/2006/relationships" id="258" r:id="R400f031257b14236"/>
-    <p:sldId xmlns:r="http://schemas.openxmlformats.org/officeDocument/2006/relationships" id="259" r:id="R368107698a9a4c95"/>
-    <p:sldId xmlns:r="http://schemas.openxmlformats.org/officeDocument/2006/relationships" id="260" r:id="R117429da9507444f"/>
-    <p:sldId xmlns:r="http://schemas.openxmlformats.org/officeDocument/2006/relationships" id="261" r:id="Rc3db4a3598cb42d9"/>
-    <p:sldId xmlns:r="http://schemas.openxmlformats.org/officeDocument/2006/relationships" id="262" r:id="Rb49ebafba4b44ef5"/>
-    <p:sldId xmlns:r="http://schemas.openxmlformats.org/officeDocument/2006/relationships" id="263" r:id="Rb61ec19d74ab4c1f"/>
-    <p:sldId xmlns:r="http://schemas.openxmlformats.org/officeDocument/2006/relationships" id="264" r:id="Re8b4fd1cec99410f"/>
+    <p:sldId xmlns:r="http://schemas.openxmlformats.org/officeDocument/2006/relationships" id="256" r:id="Rfead9498cfcb4af5"/>
+    <p:sldId xmlns:r="http://schemas.openxmlformats.org/officeDocument/2006/relationships" id="257" r:id="R8b1e149f71474dd0"/>
+    <p:sldId xmlns:r="http://schemas.openxmlformats.org/officeDocument/2006/relationships" id="258" r:id="R3023f36b32f648d6"/>
+    <p:sldId xmlns:r="http://schemas.openxmlformats.org/officeDocument/2006/relationships" id="259" r:id="R9cbf2bdc57f44540"/>
+    <p:sldId xmlns:r="http://schemas.openxmlformats.org/officeDocument/2006/relationships" id="260" r:id="R81929676e2ec4396"/>
+    <p:sldId xmlns:r="http://schemas.openxmlformats.org/officeDocument/2006/relationships" id="261" r:id="R2b1fca6ceb154e12"/>
+    <p:sldId xmlns:r="http://schemas.openxmlformats.org/officeDocument/2006/relationships" id="262" r:id="Ra0a8c63e44454dcb"/>
+    <p:sldId xmlns:r="http://schemas.openxmlformats.org/officeDocument/2006/relationships" id="263" r:id="R0534f2a7984c4744"/>
+    <p:sldId xmlns:r="http://schemas.openxmlformats.org/officeDocument/2006/relationships" id="264" r:id="Rc189b07b319d4daa"/>
   </p:sldIdLst>
   <p:sldSz cx="12192000" cy="6858000"/>
   <p:notesSz cx="6858000" cy="9144000"/>
   <p:embeddedFontLst>
     <p:embeddedFont>
       <p:font typeface="JetBrains Mono"/>
-      <p:regular xmlns:r="http://schemas.openxmlformats.org/officeDocument/2006/relationships" r:id="R39999b29a0d0444e"/>
+      <p:regular xmlns:r="http://schemas.openxmlformats.org/officeDocument/2006/relationships" r:id="R7ed014c6a4ac42d2"/>
     </p:embeddedFont>
   </p:embeddedFontLst>
 </p:presentation>
@@ -1071,7 +1071,7 @@
           <p:nvPr/>
         </p:nvPicPr>
         <p:blipFill rotWithShape="1">
-          <a:blip xmlns:r="http://schemas.openxmlformats.org/officeDocument/2006/relationships" xmlns:a="http://schemas.openxmlformats.org/drawingml/2006/main" r:embed="Raf9736bd1c854b83"/>
+          <a:blip xmlns:r="http://schemas.openxmlformats.org/officeDocument/2006/relationships" xmlns:a="http://schemas.openxmlformats.org/drawingml/2006/main" r:embed="R2fa392a0752140aa"/>
           <a:stretch xmlns:a="http://schemas.openxmlformats.org/drawingml/2006/main"/>
         </p:blipFill>
         <p:spPr>
@@ -1451,7 +1451,7 @@
           <p:nvPr/>
         </p:nvPicPr>
         <p:blipFill rotWithShape="1">
-          <a:blip xmlns:r="http://schemas.openxmlformats.org/officeDocument/2006/relationships" xmlns:a="http://schemas.openxmlformats.org/drawingml/2006/main" r:embed="Rc9bf5064387c4c18">
+          <a:blip xmlns:r="http://schemas.openxmlformats.org/officeDocument/2006/relationships" xmlns:a="http://schemas.openxmlformats.org/drawingml/2006/main" r:embed="R1504adf06e7444dc">
             <a:alphaModFix amt="28000"/>
           </a:blip>
           <a:stretch xmlns:a="http://schemas.openxmlformats.org/drawingml/2006/main"/>
@@ -1664,7 +1664,7 @@
           <p:nvPr/>
         </p:nvPicPr>
         <p:blipFill rotWithShape="1">
-          <a:blip xmlns:r="http://schemas.openxmlformats.org/officeDocument/2006/relationships" xmlns:a="http://schemas.openxmlformats.org/drawingml/2006/main" r:embed="Rd4ae46bc37b54ae1">
+          <a:blip xmlns:r="http://schemas.openxmlformats.org/officeDocument/2006/relationships" xmlns:a="http://schemas.openxmlformats.org/drawingml/2006/main" r:embed="R09e46bbdacdb4293">
             <a:alphaModFix amt="28000"/>
           </a:blip>
           <a:stretch xmlns:a="http://schemas.openxmlformats.org/drawingml/2006/main"/>
@@ -1899,7 +1899,7 @@
           <p:nvPr/>
         </p:nvPicPr>
         <p:blipFill rotWithShape="1">
-          <a:blip xmlns:r="http://schemas.openxmlformats.org/officeDocument/2006/relationships" xmlns:a="http://schemas.openxmlformats.org/drawingml/2006/main" r:embed="Ra5305435757448e4">
+          <a:blip xmlns:r="http://schemas.openxmlformats.org/officeDocument/2006/relationships" xmlns:a="http://schemas.openxmlformats.org/drawingml/2006/main" r:embed="R87af0a21eddf42a9">
             <a:alphaModFix amt="28000"/>
           </a:blip>
           <a:stretch xmlns:a="http://schemas.openxmlformats.org/drawingml/2006/main"/>
@@ -2176,7 +2176,7 @@
           <p:nvPr/>
         </p:nvPicPr>
         <p:blipFill rotWithShape="1">
-          <a:blip xmlns:r="http://schemas.openxmlformats.org/officeDocument/2006/relationships" xmlns:a="http://schemas.openxmlformats.org/drawingml/2006/main" r:embed="R1765b78eb5124579">
+          <a:blip xmlns:r="http://schemas.openxmlformats.org/officeDocument/2006/relationships" xmlns:a="http://schemas.openxmlformats.org/drawingml/2006/main" r:embed="R5c1549c33a0744a4">
             <a:alphaModFix amt="28000"/>
           </a:blip>
           <a:stretch xmlns:a="http://schemas.openxmlformats.org/drawingml/2006/main"/>
@@ -2451,7 +2451,7 @@
           <p:nvPr/>
         </p:nvPicPr>
         <p:blipFill rotWithShape="1">
-          <a:blip xmlns:r="http://schemas.openxmlformats.org/officeDocument/2006/relationships" xmlns:a="http://schemas.openxmlformats.org/drawingml/2006/main" r:embed="R876799b9429649c6">
+          <a:blip xmlns:r="http://schemas.openxmlformats.org/officeDocument/2006/relationships" xmlns:a="http://schemas.openxmlformats.org/drawingml/2006/main" r:embed="R7a0ff05ecdbf4928">
             <a:alphaModFix amt="28000"/>
           </a:blip>
           <a:stretch xmlns:a="http://schemas.openxmlformats.org/drawingml/2006/main"/>
@@ -2875,7 +2875,7 @@
           <p:nvPr/>
         </p:nvPicPr>
         <p:blipFill rotWithShape="1">
-          <a:blip xmlns:r="http://schemas.openxmlformats.org/officeDocument/2006/relationships" xmlns:a="http://schemas.openxmlformats.org/drawingml/2006/main" r:embed="R39b4ab02b6b545bc">
+          <a:blip xmlns:r="http://schemas.openxmlformats.org/officeDocument/2006/relationships" xmlns:a="http://schemas.openxmlformats.org/drawingml/2006/main" r:embed="R0b7bbc70a8a0493b">
             <a:alphaModFix amt="28000"/>
           </a:blip>
           <a:stretch xmlns:a="http://schemas.openxmlformats.org/drawingml/2006/main"/>
@@ -3016,7 +3016,7 @@
           <p:nvPr/>
         </p:nvPicPr>
         <p:blipFill rotWithShape="1">
-          <a:blip xmlns:r="http://schemas.openxmlformats.org/officeDocument/2006/relationships" xmlns:a="http://schemas.openxmlformats.org/drawingml/2006/main" r:embed="R1990b77c0137452c">
+          <a:blip xmlns:r="http://schemas.openxmlformats.org/officeDocument/2006/relationships" xmlns:a="http://schemas.openxmlformats.org/drawingml/2006/main" r:embed="R46312a652d244105">
             <a:alphaModFix amt="28000"/>
           </a:blip>
           <a:stretch xmlns:a="http://schemas.openxmlformats.org/drawingml/2006/main"/>
@@ -3130,7 +3130,7 @@
           <p:nvPr/>
         </p:nvPicPr>
         <p:blipFill rotWithShape="1">
-          <a:blip xmlns:r="http://schemas.openxmlformats.org/officeDocument/2006/relationships" xmlns:a="http://schemas.openxmlformats.org/drawingml/2006/main" r:embed="Rccc988a151cf488d">
+          <a:blip xmlns:r="http://schemas.openxmlformats.org/officeDocument/2006/relationships" xmlns:a="http://schemas.openxmlformats.org/drawingml/2006/main" r:embed="R81c78659c5fd4c24">
             <a:alphaModFix amt="28000"/>
           </a:blip>
           <a:stretch xmlns:a="http://schemas.openxmlformats.org/drawingml/2006/main"/>
@@ -3457,7 +3457,7 @@
           <p:nvPr/>
         </p:nvPicPr>
         <p:blipFill rotWithShape="1">
-          <a:blip xmlns:r="http://schemas.openxmlformats.org/officeDocument/2006/relationships" xmlns:a="http://schemas.openxmlformats.org/drawingml/2006/main" r:embed="R3a4f8dae8a9b493d">
+          <a:blip xmlns:r="http://schemas.openxmlformats.org/officeDocument/2006/relationships" xmlns:a="http://schemas.openxmlformats.org/drawingml/2006/main" r:embed="R5294deb95cd149ee">
             <a:alphaModFix amt="28000"/>
           </a:blip>
           <a:stretch xmlns:a="http://schemas.openxmlformats.org/drawingml/2006/main"/>
@@ -3745,7 +3745,7 @@
           <p:nvPr/>
         </p:nvPicPr>
         <p:blipFill rotWithShape="1">
-          <a:blip xmlns:r="http://schemas.openxmlformats.org/officeDocument/2006/relationships" xmlns:a="http://schemas.openxmlformats.org/drawingml/2006/main" r:embed="Rc5244c083b8a42c4">
+          <a:blip xmlns:r="http://schemas.openxmlformats.org/officeDocument/2006/relationships" xmlns:a="http://schemas.openxmlformats.org/drawingml/2006/main" r:embed="Rfba7761093c04de2">
             <a:alphaModFix amt="28000"/>
           </a:blip>
           <a:stretch xmlns:a="http://schemas.openxmlformats.org/drawingml/2006/main"/>
@@ -3982,17 +3982,17 @@
   </p:cSld>
   <p:clrMap bg1="lt1" tx1="dk1" bg2="lt2" tx2="dk2" accent1="accent1" accent2="accent2" accent3="accent3" accent4="accent4" accent5="accent5" accent6="accent6" hlink="hlink" folHlink="folHlink"/>
   <p:sldLayoutIdLst>
-    <p:sldLayoutId xmlns:r="http://schemas.openxmlformats.org/officeDocument/2006/relationships" id="2147483649" r:id="R535150d9bbc24df4"/>
-    <p:sldLayoutId xmlns:r="http://schemas.openxmlformats.org/officeDocument/2006/relationships" id="2147483650" r:id="R842aaee4b7544172"/>
-    <p:sldLayoutId xmlns:r="http://schemas.openxmlformats.org/officeDocument/2006/relationships" id="2147483651" r:id="R80546083cdb245b5"/>
-    <p:sldLayoutId xmlns:r="http://schemas.openxmlformats.org/officeDocument/2006/relationships" id="2147483652" r:id="Rc07df39f8cd34650"/>
-    <p:sldLayoutId xmlns:r="http://schemas.openxmlformats.org/officeDocument/2006/relationships" id="2147483653" r:id="R9963fc57c3864d4a"/>
-    <p:sldLayoutId xmlns:r="http://schemas.openxmlformats.org/officeDocument/2006/relationships" id="2147483654" r:id="Rf9284783edb34535"/>
-    <p:sldLayoutId xmlns:r="http://schemas.openxmlformats.org/officeDocument/2006/relationships" id="2147483655" r:id="R592959e1f76b4a5e"/>
-    <p:sldLayoutId xmlns:r="http://schemas.openxmlformats.org/officeDocument/2006/relationships" id="2147483656" r:id="Rca1bbc242b63495c"/>
-    <p:sldLayoutId xmlns:r="http://schemas.openxmlformats.org/officeDocument/2006/relationships" id="2147483657" r:id="R1ea09b4067644d7f"/>
-    <p:sldLayoutId xmlns:r="http://schemas.openxmlformats.org/officeDocument/2006/relationships" id="2147483658" r:id="R35b717b8bc58406d"/>
-    <p:sldLayoutId xmlns:r="http://schemas.openxmlformats.org/officeDocument/2006/relationships" id="2147483659" r:id="R87cee670a18c4694"/>
+    <p:sldLayoutId xmlns:r="http://schemas.openxmlformats.org/officeDocument/2006/relationships" id="2147483649" r:id="R4fb033be3abf47ac"/>
+    <p:sldLayoutId xmlns:r="http://schemas.openxmlformats.org/officeDocument/2006/relationships" id="2147483650" r:id="R4fee21b63613418e"/>
+    <p:sldLayoutId xmlns:r="http://schemas.openxmlformats.org/officeDocument/2006/relationships" id="2147483651" r:id="R04be96f56cb0441a"/>
+    <p:sldLayoutId xmlns:r="http://schemas.openxmlformats.org/officeDocument/2006/relationships" id="2147483652" r:id="Rf37a56a49d5b4ac7"/>
+    <p:sldLayoutId xmlns:r="http://schemas.openxmlformats.org/officeDocument/2006/relationships" id="2147483653" r:id="R9ba617453342485e"/>
+    <p:sldLayoutId xmlns:r="http://schemas.openxmlformats.org/officeDocument/2006/relationships" id="2147483654" r:id="R1338b1077f0e428b"/>
+    <p:sldLayoutId xmlns:r="http://schemas.openxmlformats.org/officeDocument/2006/relationships" id="2147483655" r:id="R6a9a6587cf7442c1"/>
+    <p:sldLayoutId xmlns:r="http://schemas.openxmlformats.org/officeDocument/2006/relationships" id="2147483656" r:id="R3989c580d0b7401e"/>
+    <p:sldLayoutId xmlns:r="http://schemas.openxmlformats.org/officeDocument/2006/relationships" id="2147483657" r:id="Rc650d3f082d34697"/>
+    <p:sldLayoutId xmlns:r="http://schemas.openxmlformats.org/officeDocument/2006/relationships" id="2147483658" r:id="Rec93558218ed4f70"/>
+    <p:sldLayoutId xmlns:r="http://schemas.openxmlformats.org/officeDocument/2006/relationships" id="2147483659" r:id="Rc4cbaee6d9ca4079"/>
   </p:sldLayoutIdLst>
   <p:hf hdr="0" ftr="0" dt="0"/>
   <p:txStyles>
@@ -8332,7 +8332,7 @@
             <a:r>
               <a:rPr sz="2050" b="0">
                 <a:solidFill>
-                  <a:srgbClr val="1750EB"/>
+                  <a:srgbClr val="C45E00"/>
                 </a:solidFill>
                 <a:latin typeface="JetBrains Mono"/>
                 <a:ea typeface="JetBrains Mono"/>

--- a/Mapped Curriculum Lessons/Grade 7/Lesson 19 - Random Steps and Choices/Random Steps and Choices - Slides.pptx
+++ b/Mapped Curriculum Lessons/Grade 7/Lesson 19 - Random Steps and Choices/Random Steps and Choices - Slides.pptx
@@ -2,28 +2,28 @@
 <file path=ppt/presentation.xml><?xml version="1.0" encoding="utf-8"?>
 <p:presentation xmlns:p="http://schemas.openxmlformats.org/presentationml/2006/main" embedTrueTypeFonts="1" saveSubsetFonts="0">
   <p:sldMasterIdLst>
-    <p:sldMasterId xmlns:r="http://schemas.openxmlformats.org/officeDocument/2006/relationships" id="2147483648" r:id="R658c6588976641d8"/>
+    <p:sldMasterId xmlns:r="http://schemas.openxmlformats.org/officeDocument/2006/relationships" id="2147483648" r:id="Rdd537dc14e1b472f"/>
   </p:sldMasterIdLst>
   <p:notesMasterIdLst>
-    <p:notesMasterId xmlns:r="http://schemas.openxmlformats.org/officeDocument/2006/relationships" r:id="Ref5209d45dc0456e"/>
+    <p:notesMasterId xmlns:r="http://schemas.openxmlformats.org/officeDocument/2006/relationships" r:id="Rcd734d703ad74dbd"/>
   </p:notesMasterIdLst>
   <p:sldIdLst>
-    <p:sldId xmlns:r="http://schemas.openxmlformats.org/officeDocument/2006/relationships" id="256" r:id="Rfead9498cfcb4af5"/>
-    <p:sldId xmlns:r="http://schemas.openxmlformats.org/officeDocument/2006/relationships" id="257" r:id="R8b1e149f71474dd0"/>
-    <p:sldId xmlns:r="http://schemas.openxmlformats.org/officeDocument/2006/relationships" id="258" r:id="R3023f36b32f648d6"/>
-    <p:sldId xmlns:r="http://schemas.openxmlformats.org/officeDocument/2006/relationships" id="259" r:id="R9cbf2bdc57f44540"/>
-    <p:sldId xmlns:r="http://schemas.openxmlformats.org/officeDocument/2006/relationships" id="260" r:id="R81929676e2ec4396"/>
-    <p:sldId xmlns:r="http://schemas.openxmlformats.org/officeDocument/2006/relationships" id="261" r:id="R2b1fca6ceb154e12"/>
-    <p:sldId xmlns:r="http://schemas.openxmlformats.org/officeDocument/2006/relationships" id="262" r:id="Ra0a8c63e44454dcb"/>
-    <p:sldId xmlns:r="http://schemas.openxmlformats.org/officeDocument/2006/relationships" id="263" r:id="R0534f2a7984c4744"/>
-    <p:sldId xmlns:r="http://schemas.openxmlformats.org/officeDocument/2006/relationships" id="264" r:id="Rc189b07b319d4daa"/>
+    <p:sldId xmlns:r="http://schemas.openxmlformats.org/officeDocument/2006/relationships" id="256" r:id="R5ba2c890320d42f4"/>
+    <p:sldId xmlns:r="http://schemas.openxmlformats.org/officeDocument/2006/relationships" id="257" r:id="R0db87b17fc404689"/>
+    <p:sldId xmlns:r="http://schemas.openxmlformats.org/officeDocument/2006/relationships" id="258" r:id="R92f2e8052a5d44cf"/>
+    <p:sldId xmlns:r="http://schemas.openxmlformats.org/officeDocument/2006/relationships" id="259" r:id="R319efc384c4e4b71"/>
+    <p:sldId xmlns:r="http://schemas.openxmlformats.org/officeDocument/2006/relationships" id="260" r:id="Rea8c1623259f4d38"/>
+    <p:sldId xmlns:r="http://schemas.openxmlformats.org/officeDocument/2006/relationships" id="261" r:id="Rb8b0c88fca624582"/>
+    <p:sldId xmlns:r="http://schemas.openxmlformats.org/officeDocument/2006/relationships" id="262" r:id="Rc9e8387257f34088"/>
+    <p:sldId xmlns:r="http://schemas.openxmlformats.org/officeDocument/2006/relationships" id="263" r:id="R53b2ee1112514c6e"/>
+    <p:sldId xmlns:r="http://schemas.openxmlformats.org/officeDocument/2006/relationships" id="264" r:id="R0a95ad0bc4e94df2"/>
   </p:sldIdLst>
   <p:sldSz cx="12192000" cy="6858000"/>
   <p:notesSz cx="6858000" cy="9144000"/>
   <p:embeddedFontLst>
     <p:embeddedFont>
       <p:font typeface="JetBrains Mono"/>
-      <p:regular xmlns:r="http://schemas.openxmlformats.org/officeDocument/2006/relationships" r:id="R7ed014c6a4ac42d2"/>
+      <p:regular xmlns:r="http://schemas.openxmlformats.org/officeDocument/2006/relationships" r:id="R4520aac755744681"/>
     </p:embeddedFont>
   </p:embeddedFontLst>
 </p:presentation>
@@ -1071,7 +1071,7 @@
           <p:nvPr/>
         </p:nvPicPr>
         <p:blipFill rotWithShape="1">
-          <a:blip xmlns:r="http://schemas.openxmlformats.org/officeDocument/2006/relationships" xmlns:a="http://schemas.openxmlformats.org/drawingml/2006/main" r:embed="R2fa392a0752140aa"/>
+          <a:blip xmlns:r="http://schemas.openxmlformats.org/officeDocument/2006/relationships" xmlns:a="http://schemas.openxmlformats.org/drawingml/2006/main" r:embed="Rde558024a44049f9"/>
           <a:stretch xmlns:a="http://schemas.openxmlformats.org/drawingml/2006/main"/>
         </p:blipFill>
         <p:spPr>
@@ -1451,7 +1451,7 @@
           <p:nvPr/>
         </p:nvPicPr>
         <p:blipFill rotWithShape="1">
-          <a:blip xmlns:r="http://schemas.openxmlformats.org/officeDocument/2006/relationships" xmlns:a="http://schemas.openxmlformats.org/drawingml/2006/main" r:embed="R1504adf06e7444dc">
+          <a:blip xmlns:r="http://schemas.openxmlformats.org/officeDocument/2006/relationships" xmlns:a="http://schemas.openxmlformats.org/drawingml/2006/main" r:embed="R2dc7727f0cbd4e99">
             <a:alphaModFix amt="28000"/>
           </a:blip>
           <a:stretch xmlns:a="http://schemas.openxmlformats.org/drawingml/2006/main"/>
@@ -1664,7 +1664,7 @@
           <p:nvPr/>
         </p:nvPicPr>
         <p:blipFill rotWithShape="1">
-          <a:blip xmlns:r="http://schemas.openxmlformats.org/officeDocument/2006/relationships" xmlns:a="http://schemas.openxmlformats.org/drawingml/2006/main" r:embed="R09e46bbdacdb4293">
+          <a:blip xmlns:r="http://schemas.openxmlformats.org/officeDocument/2006/relationships" xmlns:a="http://schemas.openxmlformats.org/drawingml/2006/main" r:embed="Rbdadc0b82dc54446">
             <a:alphaModFix amt="28000"/>
           </a:blip>
           <a:stretch xmlns:a="http://schemas.openxmlformats.org/drawingml/2006/main"/>
@@ -1899,7 +1899,7 @@
           <p:nvPr/>
         </p:nvPicPr>
         <p:blipFill rotWithShape="1">
-          <a:blip xmlns:r="http://schemas.openxmlformats.org/officeDocument/2006/relationships" xmlns:a="http://schemas.openxmlformats.org/drawingml/2006/main" r:embed="R87af0a21eddf42a9">
+          <a:blip xmlns:r="http://schemas.openxmlformats.org/officeDocument/2006/relationships" xmlns:a="http://schemas.openxmlformats.org/drawingml/2006/main" r:embed="R2c9e22a3ee464051">
             <a:alphaModFix amt="28000"/>
           </a:blip>
           <a:stretch xmlns:a="http://schemas.openxmlformats.org/drawingml/2006/main"/>
@@ -2176,7 +2176,7 @@
           <p:nvPr/>
         </p:nvPicPr>
         <p:blipFill rotWithShape="1">
-          <a:blip xmlns:r="http://schemas.openxmlformats.org/officeDocument/2006/relationships" xmlns:a="http://schemas.openxmlformats.org/drawingml/2006/main" r:embed="R5c1549c33a0744a4">
+          <a:blip xmlns:r="http://schemas.openxmlformats.org/officeDocument/2006/relationships" xmlns:a="http://schemas.openxmlformats.org/drawingml/2006/main" r:embed="R22948535ac204dee">
             <a:alphaModFix amt="28000"/>
           </a:blip>
           <a:stretch xmlns:a="http://schemas.openxmlformats.org/drawingml/2006/main"/>
@@ -2451,7 +2451,7 @@
           <p:nvPr/>
         </p:nvPicPr>
         <p:blipFill rotWithShape="1">
-          <a:blip xmlns:r="http://schemas.openxmlformats.org/officeDocument/2006/relationships" xmlns:a="http://schemas.openxmlformats.org/drawingml/2006/main" r:embed="R7a0ff05ecdbf4928">
+          <a:blip xmlns:r="http://schemas.openxmlformats.org/officeDocument/2006/relationships" xmlns:a="http://schemas.openxmlformats.org/drawingml/2006/main" r:embed="R5a497fdd1c5f49c2">
             <a:alphaModFix amt="28000"/>
           </a:blip>
           <a:stretch xmlns:a="http://schemas.openxmlformats.org/drawingml/2006/main"/>
@@ -2875,7 +2875,7 @@
           <p:nvPr/>
         </p:nvPicPr>
         <p:blipFill rotWithShape="1">
-          <a:blip xmlns:r="http://schemas.openxmlformats.org/officeDocument/2006/relationships" xmlns:a="http://schemas.openxmlformats.org/drawingml/2006/main" r:embed="R0b7bbc70a8a0493b">
+          <a:blip xmlns:r="http://schemas.openxmlformats.org/officeDocument/2006/relationships" xmlns:a="http://schemas.openxmlformats.org/drawingml/2006/main" r:embed="R57c34519c1494a14">
             <a:alphaModFix amt="28000"/>
           </a:blip>
           <a:stretch xmlns:a="http://schemas.openxmlformats.org/drawingml/2006/main"/>
@@ -3016,7 +3016,7 @@
           <p:nvPr/>
         </p:nvPicPr>
         <p:blipFill rotWithShape="1">
-          <a:blip xmlns:r="http://schemas.openxmlformats.org/officeDocument/2006/relationships" xmlns:a="http://schemas.openxmlformats.org/drawingml/2006/main" r:embed="R46312a652d244105">
+          <a:blip xmlns:r="http://schemas.openxmlformats.org/officeDocument/2006/relationships" xmlns:a="http://schemas.openxmlformats.org/drawingml/2006/main" r:embed="Rfd12019222a04efd">
             <a:alphaModFix amt="28000"/>
           </a:blip>
           <a:stretch xmlns:a="http://schemas.openxmlformats.org/drawingml/2006/main"/>
@@ -3130,7 +3130,7 @@
           <p:nvPr/>
         </p:nvPicPr>
         <p:blipFill rotWithShape="1">
-          <a:blip xmlns:r="http://schemas.openxmlformats.org/officeDocument/2006/relationships" xmlns:a="http://schemas.openxmlformats.org/drawingml/2006/main" r:embed="R81c78659c5fd4c24">
+          <a:blip xmlns:r="http://schemas.openxmlformats.org/officeDocument/2006/relationships" xmlns:a="http://schemas.openxmlformats.org/drawingml/2006/main" r:embed="R7065f45b72094703">
             <a:alphaModFix amt="28000"/>
           </a:blip>
           <a:stretch xmlns:a="http://schemas.openxmlformats.org/drawingml/2006/main"/>
@@ -3457,7 +3457,7 @@
           <p:nvPr/>
         </p:nvPicPr>
         <p:blipFill rotWithShape="1">
-          <a:blip xmlns:r="http://schemas.openxmlformats.org/officeDocument/2006/relationships" xmlns:a="http://schemas.openxmlformats.org/drawingml/2006/main" r:embed="R5294deb95cd149ee">
+          <a:blip xmlns:r="http://schemas.openxmlformats.org/officeDocument/2006/relationships" xmlns:a="http://schemas.openxmlformats.org/drawingml/2006/main" r:embed="R83e8c00fea674671">
             <a:alphaModFix amt="28000"/>
           </a:blip>
           <a:stretch xmlns:a="http://schemas.openxmlformats.org/drawingml/2006/main"/>
@@ -3745,7 +3745,7 @@
           <p:nvPr/>
         </p:nvPicPr>
         <p:blipFill rotWithShape="1">
-          <a:blip xmlns:r="http://schemas.openxmlformats.org/officeDocument/2006/relationships" xmlns:a="http://schemas.openxmlformats.org/drawingml/2006/main" r:embed="Rfba7761093c04de2">
+          <a:blip xmlns:r="http://schemas.openxmlformats.org/officeDocument/2006/relationships" xmlns:a="http://schemas.openxmlformats.org/drawingml/2006/main" r:embed="Rb6e6888a68b74aca">
             <a:alphaModFix amt="28000"/>
           </a:blip>
           <a:stretch xmlns:a="http://schemas.openxmlformats.org/drawingml/2006/main"/>
@@ -3982,17 +3982,17 @@
   </p:cSld>
   <p:clrMap bg1="lt1" tx1="dk1" bg2="lt2" tx2="dk2" accent1="accent1" accent2="accent2" accent3="accent3" accent4="accent4" accent5="accent5" accent6="accent6" hlink="hlink" folHlink="folHlink"/>
   <p:sldLayoutIdLst>
-    <p:sldLayoutId xmlns:r="http://schemas.openxmlformats.org/officeDocument/2006/relationships" id="2147483649" r:id="R4fb033be3abf47ac"/>
-    <p:sldLayoutId xmlns:r="http://schemas.openxmlformats.org/officeDocument/2006/relationships" id="2147483650" r:id="R4fee21b63613418e"/>
-    <p:sldLayoutId xmlns:r="http://schemas.openxmlformats.org/officeDocument/2006/relationships" id="2147483651" r:id="R04be96f56cb0441a"/>
-    <p:sldLayoutId xmlns:r="http://schemas.openxmlformats.org/officeDocument/2006/relationships" id="2147483652" r:id="Rf37a56a49d5b4ac7"/>
-    <p:sldLayoutId xmlns:r="http://schemas.openxmlformats.org/officeDocument/2006/relationships" id="2147483653" r:id="R9ba617453342485e"/>
-    <p:sldLayoutId xmlns:r="http://schemas.openxmlformats.org/officeDocument/2006/relationships" id="2147483654" r:id="R1338b1077f0e428b"/>
-    <p:sldLayoutId xmlns:r="http://schemas.openxmlformats.org/officeDocument/2006/relationships" id="2147483655" r:id="R6a9a6587cf7442c1"/>
-    <p:sldLayoutId xmlns:r="http://schemas.openxmlformats.org/officeDocument/2006/relationships" id="2147483656" r:id="R3989c580d0b7401e"/>
-    <p:sldLayoutId xmlns:r="http://schemas.openxmlformats.org/officeDocument/2006/relationships" id="2147483657" r:id="Rc650d3f082d34697"/>
-    <p:sldLayoutId xmlns:r="http://schemas.openxmlformats.org/officeDocument/2006/relationships" id="2147483658" r:id="Rec93558218ed4f70"/>
-    <p:sldLayoutId xmlns:r="http://schemas.openxmlformats.org/officeDocument/2006/relationships" id="2147483659" r:id="Rc4cbaee6d9ca4079"/>
+    <p:sldLayoutId xmlns:r="http://schemas.openxmlformats.org/officeDocument/2006/relationships" id="2147483649" r:id="R2f8c5345e5dc4738"/>
+    <p:sldLayoutId xmlns:r="http://schemas.openxmlformats.org/officeDocument/2006/relationships" id="2147483650" r:id="R007c30c4e32347b6"/>
+    <p:sldLayoutId xmlns:r="http://schemas.openxmlformats.org/officeDocument/2006/relationships" id="2147483651" r:id="R4c78717df786451d"/>
+    <p:sldLayoutId xmlns:r="http://schemas.openxmlformats.org/officeDocument/2006/relationships" id="2147483652" r:id="Rdc98d608017e45a3"/>
+    <p:sldLayoutId xmlns:r="http://schemas.openxmlformats.org/officeDocument/2006/relationships" id="2147483653" r:id="R2f4643e55c424c90"/>
+    <p:sldLayoutId xmlns:r="http://schemas.openxmlformats.org/officeDocument/2006/relationships" id="2147483654" r:id="R6f04d00997234ceb"/>
+    <p:sldLayoutId xmlns:r="http://schemas.openxmlformats.org/officeDocument/2006/relationships" id="2147483655" r:id="Re1436e10e22a4db4"/>
+    <p:sldLayoutId xmlns:r="http://schemas.openxmlformats.org/officeDocument/2006/relationships" id="2147483656" r:id="R02da3127bf5946e2"/>
+    <p:sldLayoutId xmlns:r="http://schemas.openxmlformats.org/officeDocument/2006/relationships" id="2147483657" r:id="Rfe07f01019a444b7"/>
+    <p:sldLayoutId xmlns:r="http://schemas.openxmlformats.org/officeDocument/2006/relationships" id="2147483658" r:id="R9bc4b3a266bc464e"/>
+    <p:sldLayoutId xmlns:r="http://schemas.openxmlformats.org/officeDocument/2006/relationships" id="2147483659" r:id="Rf1d556588f7e43a0"/>
   </p:sldLayoutIdLst>
   <p:hf hdr="0" ftr="0" dt="0"/>
   <p:txStyles>
@@ -4898,13 +4898,24 @@
             <a:r>
               <a:rPr sz="2400">
                 <a:solidFill>
-                  <a:srgbClr val="080808"/>
-                </a:solidFill>
-                <a:latin typeface="JetBrains Mono"/>
-                <a:ea typeface="JetBrains Mono"/>
-                <a:cs typeface="JetBrains Mono"/>
-              </a:rPr>
-              <a:t>import random</a:t>
+                  <a:srgbClr val="C45E00"/>
+                </a:solidFill>
+                <a:latin typeface="JetBrains Mono"/>
+                <a:ea typeface="JetBrains Mono"/>
+                <a:cs typeface="JetBrains Mono"/>
+              </a:rPr>
+              <a:t>import</a:t>
+            </a:r>
+            <a:r>
+              <a:rPr sz="2400">
+                <a:solidFill>
+                  <a:srgbClr val="080808"/>
+                </a:solidFill>
+                <a:latin typeface="JetBrains Mono"/>
+                <a:ea typeface="JetBrains Mono"/>
+                <a:cs typeface="JetBrains Mono"/>
+              </a:rPr>
+              <a:t> random</a:t>
             </a:r>
           </a:p>
           <a:p xmlns:a="http://schemas.openxmlformats.org/drawingml/2006/main">
@@ -5369,13 +5380,24 @@
             <a:r>
               <a:rPr sz="2400">
                 <a:solidFill>
-                  <a:srgbClr val="080808"/>
-                </a:solidFill>
-                <a:latin typeface="JetBrains Mono"/>
-                <a:ea typeface="JetBrains Mono"/>
-                <a:cs typeface="JetBrains Mono"/>
-              </a:rPr>
-              <a:t>import random</a:t>
+                  <a:srgbClr val="C45E00"/>
+                </a:solidFill>
+                <a:latin typeface="JetBrains Mono"/>
+                <a:ea typeface="JetBrains Mono"/>
+                <a:cs typeface="JetBrains Mono"/>
+              </a:rPr>
+              <a:t>import</a:t>
+            </a:r>
+            <a:r>
+              <a:rPr sz="2400">
+                <a:solidFill>
+                  <a:srgbClr val="080808"/>
+                </a:solidFill>
+                <a:latin typeface="JetBrains Mono"/>
+                <a:ea typeface="JetBrains Mono"/>
+                <a:cs typeface="JetBrains Mono"/>
+              </a:rPr>
+              <a:t> random</a:t>
             </a:r>
           </a:p>
           <a:p xmlns:a="http://schemas.openxmlformats.org/drawingml/2006/main">
@@ -5840,13 +5862,24 @@
             <a:r>
               <a:rPr sz="2400">
                 <a:solidFill>
-                  <a:srgbClr val="080808"/>
-                </a:solidFill>
-                <a:latin typeface="JetBrains Mono"/>
-                <a:ea typeface="JetBrains Mono"/>
-                <a:cs typeface="JetBrains Mono"/>
-              </a:rPr>
-              <a:t>import random</a:t>
+                  <a:srgbClr val="C45E00"/>
+                </a:solidFill>
+                <a:latin typeface="JetBrains Mono"/>
+                <a:ea typeface="JetBrains Mono"/>
+                <a:cs typeface="JetBrains Mono"/>
+              </a:rPr>
+              <a:t>import</a:t>
+            </a:r>
+            <a:r>
+              <a:rPr sz="2400">
+                <a:solidFill>
+                  <a:srgbClr val="080808"/>
+                </a:solidFill>
+                <a:latin typeface="JetBrains Mono"/>
+                <a:ea typeface="JetBrains Mono"/>
+                <a:cs typeface="JetBrains Mono"/>
+              </a:rPr>
+              <a:t> random</a:t>
             </a:r>
           </a:p>
           <a:p xmlns:a="http://schemas.openxmlformats.org/drawingml/2006/main">
@@ -6562,13 +6595,24 @@
             <a:r>
               <a:rPr sz="1600">
                 <a:solidFill>
-                  <a:srgbClr val="080808"/>
-                </a:solidFill>
-                <a:latin typeface="JetBrains Mono"/>
-                <a:ea typeface="JetBrains Mono"/>
-                <a:cs typeface="JetBrains Mono"/>
-              </a:rPr>
-              <a:t>import random</a:t>
+                  <a:srgbClr val="C45E00"/>
+                </a:solidFill>
+                <a:latin typeface="JetBrains Mono"/>
+                <a:ea typeface="JetBrains Mono"/>
+                <a:cs typeface="JetBrains Mono"/>
+              </a:rPr>
+              <a:t>import</a:t>
+            </a:r>
+            <a:r>
+              <a:rPr sz="1600">
+                <a:solidFill>
+                  <a:srgbClr val="080808"/>
+                </a:solidFill>
+                <a:latin typeface="JetBrains Mono"/>
+                <a:ea typeface="JetBrains Mono"/>
+                <a:cs typeface="JetBrains Mono"/>
+              </a:rPr>
+              <a:t> random</a:t>
             </a:r>
             <a:br>
               <a:rPr sz="1600">
@@ -7189,13 +7233,24 @@
             <a:r>
               <a:rPr sz="1600">
                 <a:solidFill>
-                  <a:srgbClr val="080808"/>
-                </a:solidFill>
-                <a:latin typeface="JetBrains Mono"/>
-                <a:ea typeface="JetBrains Mono"/>
-                <a:cs typeface="JetBrains Mono"/>
-              </a:rPr>
-              <a:t>import random</a:t>
+                  <a:srgbClr val="C45E00"/>
+                </a:solidFill>
+                <a:latin typeface="JetBrains Mono"/>
+                <a:ea typeface="JetBrains Mono"/>
+                <a:cs typeface="JetBrains Mono"/>
+              </a:rPr>
+              <a:t>import</a:t>
+            </a:r>
+            <a:r>
+              <a:rPr sz="1600">
+                <a:solidFill>
+                  <a:srgbClr val="080808"/>
+                </a:solidFill>
+                <a:latin typeface="JetBrains Mono"/>
+                <a:ea typeface="JetBrains Mono"/>
+                <a:cs typeface="JetBrains Mono"/>
+              </a:rPr>
+              <a:t> random</a:t>
             </a:r>
             <a:br>
               <a:rPr sz="1600">
@@ -7998,13 +8053,24 @@
             <a:r>
               <a:rPr sz="1600">
                 <a:solidFill>
-                  <a:srgbClr val="080808"/>
-                </a:solidFill>
-                <a:latin typeface="JetBrains Mono"/>
-                <a:ea typeface="JetBrains Mono"/>
-                <a:cs typeface="JetBrains Mono"/>
-              </a:rPr>
-              <a:t>import random</a:t>
+                  <a:srgbClr val="C45E00"/>
+                </a:solidFill>
+                <a:latin typeface="JetBrains Mono"/>
+                <a:ea typeface="JetBrains Mono"/>
+                <a:cs typeface="JetBrains Mono"/>
+              </a:rPr>
+              <a:t>import</a:t>
+            </a:r>
+            <a:r>
+              <a:rPr sz="1600">
+                <a:solidFill>
+                  <a:srgbClr val="080808"/>
+                </a:solidFill>
+                <a:latin typeface="JetBrains Mono"/>
+                <a:ea typeface="JetBrains Mono"/>
+                <a:cs typeface="JetBrains Mono"/>
+              </a:rPr>
+              <a:t> random</a:t>
             </a:r>
             <a:br>
               <a:rPr sz="1600">
@@ -8691,13 +8757,24 @@
             <a:r>
               <a:rPr sz="1600">
                 <a:solidFill>
-                  <a:srgbClr val="080808"/>
-                </a:solidFill>
-                <a:latin typeface="JetBrains Mono"/>
-                <a:ea typeface="JetBrains Mono"/>
-                <a:cs typeface="JetBrains Mono"/>
-              </a:rPr>
-              <a:t>import random</a:t>
+                  <a:srgbClr val="C45E00"/>
+                </a:solidFill>
+                <a:latin typeface="JetBrains Mono"/>
+                <a:ea typeface="JetBrains Mono"/>
+                <a:cs typeface="JetBrains Mono"/>
+              </a:rPr>
+              <a:t>import</a:t>
+            </a:r>
+            <a:r>
+              <a:rPr sz="1600">
+                <a:solidFill>
+                  <a:srgbClr val="080808"/>
+                </a:solidFill>
+                <a:latin typeface="JetBrains Mono"/>
+                <a:ea typeface="JetBrains Mono"/>
+                <a:cs typeface="JetBrains Mono"/>
+              </a:rPr>
+              <a:t> random</a:t>
             </a:r>
             <a:br>
               <a:rPr sz="1600">
@@ -9007,13 +9084,24 @@
             <a:r>
               <a:rPr sz="1800">
                 <a:solidFill>
-                  <a:srgbClr val="080808"/>
-                </a:solidFill>
-                <a:latin typeface="JetBrains Mono"/>
-                <a:ea typeface="JetBrains Mono"/>
-                <a:cs typeface="JetBrains Mono"/>
-              </a:rPr>
-              <a:t>import random</a:t>
+                  <a:srgbClr val="C45E00"/>
+                </a:solidFill>
+                <a:latin typeface="JetBrains Mono"/>
+                <a:ea typeface="JetBrains Mono"/>
+                <a:cs typeface="JetBrains Mono"/>
+              </a:rPr>
+              <a:t>import</a:t>
+            </a:r>
+            <a:r>
+              <a:rPr sz="1800">
+                <a:solidFill>
+                  <a:srgbClr val="080808"/>
+                </a:solidFill>
+                <a:latin typeface="JetBrains Mono"/>
+                <a:ea typeface="JetBrains Mono"/>
+                <a:cs typeface="JetBrains Mono"/>
+              </a:rPr>
+              <a:t> random</a:t>
             </a:r>
           </a:p>
           <a:p xmlns:a="http://schemas.openxmlformats.org/drawingml/2006/main">

--- a/Mapped Curriculum Lessons/Grade 7/Lesson 19 - Random Steps and Choices/Random Steps and Choices - Slides.pptx
+++ b/Mapped Curriculum Lessons/Grade 7/Lesson 19 - Random Steps and Choices/Random Steps and Choices - Slides.pptx
@@ -2,28 +2,28 @@
 <file path=ppt/presentation.xml><?xml version="1.0" encoding="utf-8"?>
 <p:presentation xmlns:p="http://schemas.openxmlformats.org/presentationml/2006/main" embedTrueTypeFonts="1" saveSubsetFonts="0">
   <p:sldMasterIdLst>
-    <p:sldMasterId xmlns:r="http://schemas.openxmlformats.org/officeDocument/2006/relationships" id="2147483648" r:id="Rdd537dc14e1b472f"/>
+    <p:sldMasterId xmlns:r="http://schemas.openxmlformats.org/officeDocument/2006/relationships" id="2147483648" r:id="R686b1bfa63194002"/>
   </p:sldMasterIdLst>
   <p:notesMasterIdLst>
-    <p:notesMasterId xmlns:r="http://schemas.openxmlformats.org/officeDocument/2006/relationships" r:id="Rcd734d703ad74dbd"/>
+    <p:notesMasterId xmlns:r="http://schemas.openxmlformats.org/officeDocument/2006/relationships" r:id="Rfea6cbc079994041"/>
   </p:notesMasterIdLst>
   <p:sldIdLst>
-    <p:sldId xmlns:r="http://schemas.openxmlformats.org/officeDocument/2006/relationships" id="256" r:id="R5ba2c890320d42f4"/>
-    <p:sldId xmlns:r="http://schemas.openxmlformats.org/officeDocument/2006/relationships" id="257" r:id="R0db87b17fc404689"/>
-    <p:sldId xmlns:r="http://schemas.openxmlformats.org/officeDocument/2006/relationships" id="258" r:id="R92f2e8052a5d44cf"/>
-    <p:sldId xmlns:r="http://schemas.openxmlformats.org/officeDocument/2006/relationships" id="259" r:id="R319efc384c4e4b71"/>
-    <p:sldId xmlns:r="http://schemas.openxmlformats.org/officeDocument/2006/relationships" id="260" r:id="Rea8c1623259f4d38"/>
-    <p:sldId xmlns:r="http://schemas.openxmlformats.org/officeDocument/2006/relationships" id="261" r:id="Rb8b0c88fca624582"/>
-    <p:sldId xmlns:r="http://schemas.openxmlformats.org/officeDocument/2006/relationships" id="262" r:id="Rc9e8387257f34088"/>
-    <p:sldId xmlns:r="http://schemas.openxmlformats.org/officeDocument/2006/relationships" id="263" r:id="R53b2ee1112514c6e"/>
-    <p:sldId xmlns:r="http://schemas.openxmlformats.org/officeDocument/2006/relationships" id="264" r:id="R0a95ad0bc4e94df2"/>
+    <p:sldId xmlns:r="http://schemas.openxmlformats.org/officeDocument/2006/relationships" id="256" r:id="R5be2b5b2b8af4d40"/>
+    <p:sldId xmlns:r="http://schemas.openxmlformats.org/officeDocument/2006/relationships" id="257" r:id="Raea0fcc8eb2045a6"/>
+    <p:sldId xmlns:r="http://schemas.openxmlformats.org/officeDocument/2006/relationships" id="258" r:id="Rbaf57bd61fc74869"/>
+    <p:sldId xmlns:r="http://schemas.openxmlformats.org/officeDocument/2006/relationships" id="259" r:id="Rc4cb3afe481d454d"/>
+    <p:sldId xmlns:r="http://schemas.openxmlformats.org/officeDocument/2006/relationships" id="260" r:id="R57538402cf6e44c5"/>
+    <p:sldId xmlns:r="http://schemas.openxmlformats.org/officeDocument/2006/relationships" id="261" r:id="R2e36474260954807"/>
+    <p:sldId xmlns:r="http://schemas.openxmlformats.org/officeDocument/2006/relationships" id="262" r:id="Rcabc3bd1abaa41eb"/>
+    <p:sldId xmlns:r="http://schemas.openxmlformats.org/officeDocument/2006/relationships" id="263" r:id="R05c7a730b3274c4b"/>
+    <p:sldId xmlns:r="http://schemas.openxmlformats.org/officeDocument/2006/relationships" id="264" r:id="Rbbfb89ffc5894b1a"/>
   </p:sldIdLst>
   <p:sldSz cx="12192000" cy="6858000"/>
   <p:notesSz cx="6858000" cy="9144000"/>
   <p:embeddedFontLst>
     <p:embeddedFont>
       <p:font typeface="JetBrains Mono"/>
-      <p:regular xmlns:r="http://schemas.openxmlformats.org/officeDocument/2006/relationships" r:id="R4520aac755744681"/>
+      <p:regular xmlns:r="http://schemas.openxmlformats.org/officeDocument/2006/relationships" r:id="R97f175d9274f4b30"/>
     </p:embeddedFont>
   </p:embeddedFontLst>
 </p:presentation>
@@ -1071,7 +1071,7 @@
           <p:nvPr/>
         </p:nvPicPr>
         <p:blipFill rotWithShape="1">
-          <a:blip xmlns:r="http://schemas.openxmlformats.org/officeDocument/2006/relationships" xmlns:a="http://schemas.openxmlformats.org/drawingml/2006/main" r:embed="Rde558024a44049f9"/>
+          <a:blip xmlns:r="http://schemas.openxmlformats.org/officeDocument/2006/relationships" xmlns:a="http://schemas.openxmlformats.org/drawingml/2006/main" r:embed="Rca070ca4581d4847"/>
           <a:stretch xmlns:a="http://schemas.openxmlformats.org/drawingml/2006/main"/>
         </p:blipFill>
         <p:spPr>
@@ -1451,7 +1451,7 @@
           <p:nvPr/>
         </p:nvPicPr>
         <p:blipFill rotWithShape="1">
-          <a:blip xmlns:r="http://schemas.openxmlformats.org/officeDocument/2006/relationships" xmlns:a="http://schemas.openxmlformats.org/drawingml/2006/main" r:embed="R2dc7727f0cbd4e99">
+          <a:blip xmlns:r="http://schemas.openxmlformats.org/officeDocument/2006/relationships" xmlns:a="http://schemas.openxmlformats.org/drawingml/2006/main" r:embed="R5d4b5754f9934c2b">
             <a:alphaModFix amt="28000"/>
           </a:blip>
           <a:stretch xmlns:a="http://schemas.openxmlformats.org/drawingml/2006/main"/>
@@ -1664,7 +1664,7 @@
           <p:nvPr/>
         </p:nvPicPr>
         <p:blipFill rotWithShape="1">
-          <a:blip xmlns:r="http://schemas.openxmlformats.org/officeDocument/2006/relationships" xmlns:a="http://schemas.openxmlformats.org/drawingml/2006/main" r:embed="Rbdadc0b82dc54446">
+          <a:blip xmlns:r="http://schemas.openxmlformats.org/officeDocument/2006/relationships" xmlns:a="http://schemas.openxmlformats.org/drawingml/2006/main" r:embed="R3e08d9478c3b4ee0">
             <a:alphaModFix amt="28000"/>
           </a:blip>
           <a:stretch xmlns:a="http://schemas.openxmlformats.org/drawingml/2006/main"/>
@@ -1899,7 +1899,7 @@
           <p:nvPr/>
         </p:nvPicPr>
         <p:blipFill rotWithShape="1">
-          <a:blip xmlns:r="http://schemas.openxmlformats.org/officeDocument/2006/relationships" xmlns:a="http://schemas.openxmlformats.org/drawingml/2006/main" r:embed="R2c9e22a3ee464051">
+          <a:blip xmlns:r="http://schemas.openxmlformats.org/officeDocument/2006/relationships" xmlns:a="http://schemas.openxmlformats.org/drawingml/2006/main" r:embed="R530bdeae42f645bf">
             <a:alphaModFix amt="28000"/>
           </a:blip>
           <a:stretch xmlns:a="http://schemas.openxmlformats.org/drawingml/2006/main"/>
@@ -2176,7 +2176,7 @@
           <p:nvPr/>
         </p:nvPicPr>
         <p:blipFill rotWithShape="1">
-          <a:blip xmlns:r="http://schemas.openxmlformats.org/officeDocument/2006/relationships" xmlns:a="http://schemas.openxmlformats.org/drawingml/2006/main" r:embed="R22948535ac204dee">
+          <a:blip xmlns:r="http://schemas.openxmlformats.org/officeDocument/2006/relationships" xmlns:a="http://schemas.openxmlformats.org/drawingml/2006/main" r:embed="R53e0a6f7c58d45b9">
             <a:alphaModFix amt="28000"/>
           </a:blip>
           <a:stretch xmlns:a="http://schemas.openxmlformats.org/drawingml/2006/main"/>
@@ -2451,7 +2451,7 @@
           <p:nvPr/>
         </p:nvPicPr>
         <p:blipFill rotWithShape="1">
-          <a:blip xmlns:r="http://schemas.openxmlformats.org/officeDocument/2006/relationships" xmlns:a="http://schemas.openxmlformats.org/drawingml/2006/main" r:embed="R5a497fdd1c5f49c2">
+          <a:blip xmlns:r="http://schemas.openxmlformats.org/officeDocument/2006/relationships" xmlns:a="http://schemas.openxmlformats.org/drawingml/2006/main" r:embed="R66ffea02fc4d4c92">
             <a:alphaModFix amt="28000"/>
           </a:blip>
           <a:stretch xmlns:a="http://schemas.openxmlformats.org/drawingml/2006/main"/>
@@ -2875,7 +2875,7 @@
           <p:nvPr/>
         </p:nvPicPr>
         <p:blipFill rotWithShape="1">
-          <a:blip xmlns:r="http://schemas.openxmlformats.org/officeDocument/2006/relationships" xmlns:a="http://schemas.openxmlformats.org/drawingml/2006/main" r:embed="R57c34519c1494a14">
+          <a:blip xmlns:r="http://schemas.openxmlformats.org/officeDocument/2006/relationships" xmlns:a="http://schemas.openxmlformats.org/drawingml/2006/main" r:embed="Rccfe9c2997d34662">
             <a:alphaModFix amt="28000"/>
           </a:blip>
           <a:stretch xmlns:a="http://schemas.openxmlformats.org/drawingml/2006/main"/>
@@ -3016,7 +3016,7 @@
           <p:nvPr/>
         </p:nvPicPr>
         <p:blipFill rotWithShape="1">
-          <a:blip xmlns:r="http://schemas.openxmlformats.org/officeDocument/2006/relationships" xmlns:a="http://schemas.openxmlformats.org/drawingml/2006/main" r:embed="Rfd12019222a04efd">
+          <a:blip xmlns:r="http://schemas.openxmlformats.org/officeDocument/2006/relationships" xmlns:a="http://schemas.openxmlformats.org/drawingml/2006/main" r:embed="Raf8b8cde9de4489a">
             <a:alphaModFix amt="28000"/>
           </a:blip>
           <a:stretch xmlns:a="http://schemas.openxmlformats.org/drawingml/2006/main"/>
@@ -3130,7 +3130,7 @@
           <p:nvPr/>
         </p:nvPicPr>
         <p:blipFill rotWithShape="1">
-          <a:blip xmlns:r="http://schemas.openxmlformats.org/officeDocument/2006/relationships" xmlns:a="http://schemas.openxmlformats.org/drawingml/2006/main" r:embed="R7065f45b72094703">
+          <a:blip xmlns:r="http://schemas.openxmlformats.org/officeDocument/2006/relationships" xmlns:a="http://schemas.openxmlformats.org/drawingml/2006/main" r:embed="R302c470591b747ec">
             <a:alphaModFix amt="28000"/>
           </a:blip>
           <a:stretch xmlns:a="http://schemas.openxmlformats.org/drawingml/2006/main"/>
@@ -3457,7 +3457,7 @@
           <p:nvPr/>
         </p:nvPicPr>
         <p:blipFill rotWithShape="1">
-          <a:blip xmlns:r="http://schemas.openxmlformats.org/officeDocument/2006/relationships" xmlns:a="http://schemas.openxmlformats.org/drawingml/2006/main" r:embed="R83e8c00fea674671">
+          <a:blip xmlns:r="http://schemas.openxmlformats.org/officeDocument/2006/relationships" xmlns:a="http://schemas.openxmlformats.org/drawingml/2006/main" r:embed="R7dd1d1a94ff64f76">
             <a:alphaModFix amt="28000"/>
           </a:blip>
           <a:stretch xmlns:a="http://schemas.openxmlformats.org/drawingml/2006/main"/>
@@ -3745,7 +3745,7 @@
           <p:nvPr/>
         </p:nvPicPr>
         <p:blipFill rotWithShape="1">
-          <a:blip xmlns:r="http://schemas.openxmlformats.org/officeDocument/2006/relationships" xmlns:a="http://schemas.openxmlformats.org/drawingml/2006/main" r:embed="Rb6e6888a68b74aca">
+          <a:blip xmlns:r="http://schemas.openxmlformats.org/officeDocument/2006/relationships" xmlns:a="http://schemas.openxmlformats.org/drawingml/2006/main" r:embed="R9e040ae26c8c4e12">
             <a:alphaModFix amt="28000"/>
           </a:blip>
           <a:stretch xmlns:a="http://schemas.openxmlformats.org/drawingml/2006/main"/>
@@ -3982,17 +3982,17 @@
   </p:cSld>
   <p:clrMap bg1="lt1" tx1="dk1" bg2="lt2" tx2="dk2" accent1="accent1" accent2="accent2" accent3="accent3" accent4="accent4" accent5="accent5" accent6="accent6" hlink="hlink" folHlink="folHlink"/>
   <p:sldLayoutIdLst>
-    <p:sldLayoutId xmlns:r="http://schemas.openxmlformats.org/officeDocument/2006/relationships" id="2147483649" r:id="R2f8c5345e5dc4738"/>
-    <p:sldLayoutId xmlns:r="http://schemas.openxmlformats.org/officeDocument/2006/relationships" id="2147483650" r:id="R007c30c4e32347b6"/>
-    <p:sldLayoutId xmlns:r="http://schemas.openxmlformats.org/officeDocument/2006/relationships" id="2147483651" r:id="R4c78717df786451d"/>
-    <p:sldLayoutId xmlns:r="http://schemas.openxmlformats.org/officeDocument/2006/relationships" id="2147483652" r:id="Rdc98d608017e45a3"/>
-    <p:sldLayoutId xmlns:r="http://schemas.openxmlformats.org/officeDocument/2006/relationships" id="2147483653" r:id="R2f4643e55c424c90"/>
-    <p:sldLayoutId xmlns:r="http://schemas.openxmlformats.org/officeDocument/2006/relationships" id="2147483654" r:id="R6f04d00997234ceb"/>
-    <p:sldLayoutId xmlns:r="http://schemas.openxmlformats.org/officeDocument/2006/relationships" id="2147483655" r:id="Re1436e10e22a4db4"/>
-    <p:sldLayoutId xmlns:r="http://schemas.openxmlformats.org/officeDocument/2006/relationships" id="2147483656" r:id="R02da3127bf5946e2"/>
-    <p:sldLayoutId xmlns:r="http://schemas.openxmlformats.org/officeDocument/2006/relationships" id="2147483657" r:id="Rfe07f01019a444b7"/>
-    <p:sldLayoutId xmlns:r="http://schemas.openxmlformats.org/officeDocument/2006/relationships" id="2147483658" r:id="R9bc4b3a266bc464e"/>
-    <p:sldLayoutId xmlns:r="http://schemas.openxmlformats.org/officeDocument/2006/relationships" id="2147483659" r:id="Rf1d556588f7e43a0"/>
+    <p:sldLayoutId xmlns:r="http://schemas.openxmlformats.org/officeDocument/2006/relationships" id="2147483649" r:id="Rf51dc5183fa44948"/>
+    <p:sldLayoutId xmlns:r="http://schemas.openxmlformats.org/officeDocument/2006/relationships" id="2147483650" r:id="Rc8256141e8344fde"/>
+    <p:sldLayoutId xmlns:r="http://schemas.openxmlformats.org/officeDocument/2006/relationships" id="2147483651" r:id="R6151ad16da194a0d"/>
+    <p:sldLayoutId xmlns:r="http://schemas.openxmlformats.org/officeDocument/2006/relationships" id="2147483652" r:id="R2a558054b7274dab"/>
+    <p:sldLayoutId xmlns:r="http://schemas.openxmlformats.org/officeDocument/2006/relationships" id="2147483653" r:id="Rcab2407a68c7482e"/>
+    <p:sldLayoutId xmlns:r="http://schemas.openxmlformats.org/officeDocument/2006/relationships" id="2147483654" r:id="Redb2e8db358144d4"/>
+    <p:sldLayoutId xmlns:r="http://schemas.openxmlformats.org/officeDocument/2006/relationships" id="2147483655" r:id="R19d8d36266544e7d"/>
+    <p:sldLayoutId xmlns:r="http://schemas.openxmlformats.org/officeDocument/2006/relationships" id="2147483656" r:id="R5422ce30d27b44e0"/>
+    <p:sldLayoutId xmlns:r="http://schemas.openxmlformats.org/officeDocument/2006/relationships" id="2147483657" r:id="R2356d7a78d5c4bab"/>
+    <p:sldLayoutId xmlns:r="http://schemas.openxmlformats.org/officeDocument/2006/relationships" id="2147483658" r:id="R312fdae389bc41a3"/>
+    <p:sldLayoutId xmlns:r="http://schemas.openxmlformats.org/officeDocument/2006/relationships" id="2147483659" r:id="R7d1a75fb838a4325"/>
   </p:sldLayoutIdLst>
   <p:hf hdr="0" ftr="0" dt="0"/>
   <p:txStyles>
